--- a/Week-2/Day-2/AI_SQL_dbt.pptx
+++ b/Week-2/Day-2/AI_SQL_dbt.pptx
@@ -24,33 +24,36 @@
     <p:sldId id="285" r:id="rId18"/>
     <p:sldId id="265" r:id="rId19"/>
     <p:sldId id="286" r:id="rId20"/>
-    <p:sldId id="287" r:id="rId21"/>
-    <p:sldId id="288" r:id="rId22"/>
-    <p:sldId id="289" r:id="rId23"/>
-    <p:sldId id="290" r:id="rId24"/>
-    <p:sldId id="291" r:id="rId25"/>
-    <p:sldId id="266" r:id="rId26"/>
-    <p:sldId id="292" r:id="rId27"/>
-    <p:sldId id="293" r:id="rId28"/>
-    <p:sldId id="267" r:id="rId29"/>
-    <p:sldId id="294" r:id="rId30"/>
-    <p:sldId id="295" r:id="rId31"/>
-    <p:sldId id="296" r:id="rId32"/>
-    <p:sldId id="297" r:id="rId33"/>
-    <p:sldId id="298" r:id="rId34"/>
-    <p:sldId id="268" r:id="rId35"/>
-    <p:sldId id="299" r:id="rId36"/>
-    <p:sldId id="300" r:id="rId37"/>
-    <p:sldId id="301" r:id="rId38"/>
-    <p:sldId id="269" r:id="rId39"/>
-    <p:sldId id="302" r:id="rId40"/>
-    <p:sldId id="303" r:id="rId41"/>
-    <p:sldId id="304" r:id="rId42"/>
-    <p:sldId id="270" r:id="rId43"/>
-    <p:sldId id="274" r:id="rId44"/>
-    <p:sldId id="275" r:id="rId45"/>
-    <p:sldId id="276" r:id="rId46"/>
-    <p:sldId id="277" r:id="rId47"/>
+    <p:sldId id="306" r:id="rId21"/>
+    <p:sldId id="287" r:id="rId22"/>
+    <p:sldId id="288" r:id="rId23"/>
+    <p:sldId id="289" r:id="rId24"/>
+    <p:sldId id="290" r:id="rId25"/>
+    <p:sldId id="307" r:id="rId26"/>
+    <p:sldId id="291" r:id="rId27"/>
+    <p:sldId id="266" r:id="rId28"/>
+    <p:sldId id="292" r:id="rId29"/>
+    <p:sldId id="293" r:id="rId30"/>
+    <p:sldId id="267" r:id="rId31"/>
+    <p:sldId id="294" r:id="rId32"/>
+    <p:sldId id="295" r:id="rId33"/>
+    <p:sldId id="296" r:id="rId34"/>
+    <p:sldId id="297" r:id="rId35"/>
+    <p:sldId id="298" r:id="rId36"/>
+    <p:sldId id="268" r:id="rId37"/>
+    <p:sldId id="299" r:id="rId38"/>
+    <p:sldId id="300" r:id="rId39"/>
+    <p:sldId id="301" r:id="rId40"/>
+    <p:sldId id="269" r:id="rId41"/>
+    <p:sldId id="302" r:id="rId42"/>
+    <p:sldId id="303" r:id="rId43"/>
+    <p:sldId id="304" r:id="rId44"/>
+    <p:sldId id="270" r:id="rId45"/>
+    <p:sldId id="274" r:id="rId46"/>
+    <p:sldId id="275" r:id="rId47"/>
+    <p:sldId id="276" r:id="rId48"/>
+    <p:sldId id="305" r:id="rId49"/>
+    <p:sldId id="277" r:id="rId50"/>
   </p:sldIdLst>
   <p:sldSz cx="9144000" cy="6858000" type="screen4x3"/>
   <p:notesSz cx="6858000" cy="9144000"/>
@@ -18097,6 +18100,138 @@
           <p:cNvPr id="2" name="Title 1">
             <a:extLst>
               <a:ext uri="{FF2B5EF4-FFF2-40B4-BE49-F238E27FC236}">
+                <a16:creationId xmlns:a16="http://schemas.microsoft.com/office/drawing/2014/main" id="{92E22AD6-0D8D-1617-BD11-9456BBE048BB}"/>
+              </a:ext>
+            </a:extLst>
+          </p:cNvPr>
+          <p:cNvSpPr>
+            <a:spLocks noGrp="1"/>
+          </p:cNvSpPr>
+          <p:nvPr>
+            <p:ph type="title"/>
+          </p:nvPr>
+        </p:nvSpPr>
+        <p:spPr/>
+        <p:txBody>
+          <a:bodyPr/>
+          <a:lstStyle/>
+          <a:p>
+            <a:r>
+              <a:rPr lang="en-IN" b="1" dirty="0"/>
+              <a:t>Different DBT options /DBT products</a:t>
+            </a:r>
+            <a:endParaRPr lang="en-IN" dirty="0"/>
+          </a:p>
+        </p:txBody>
+      </p:sp>
+      <p:sp>
+        <p:nvSpPr>
+          <p:cNvPr id="3" name="Content Placeholder 2">
+            <a:extLst>
+              <a:ext uri="{FF2B5EF4-FFF2-40B4-BE49-F238E27FC236}">
+                <a16:creationId xmlns:a16="http://schemas.microsoft.com/office/drawing/2014/main" id="{9567621D-79F8-05AE-7632-5AEDD350F874}"/>
+              </a:ext>
+            </a:extLst>
+          </p:cNvPr>
+          <p:cNvSpPr>
+            <a:spLocks noGrp="1"/>
+          </p:cNvSpPr>
+          <p:nvPr>
+            <p:ph idx="1"/>
+          </p:nvPr>
+        </p:nvSpPr>
+        <p:spPr/>
+        <p:txBody>
+          <a:bodyPr/>
+          <a:lstStyle/>
+          <a:p>
+            <a:r>
+              <a:rPr lang="en-US" dirty="0"/>
+              <a:t>We can access DBT using DBT Core or DBT Cloud. DBT Cloud is built around DBT Core</a:t>
+            </a:r>
+          </a:p>
+          <a:p>
+            <a:r>
+              <a:rPr lang="en-US" dirty="0"/>
+              <a:t>DBT core (CLI)</a:t>
+            </a:r>
+          </a:p>
+          <a:p>
+            <a:r>
+              <a:rPr lang="en-US" dirty="0"/>
+              <a:t>DBT cloud</a:t>
+            </a:r>
+          </a:p>
+          <a:p>
+            <a:endParaRPr lang="en-IN" dirty="0"/>
+          </a:p>
+        </p:txBody>
+      </p:sp>
+      <p:pic>
+        <p:nvPicPr>
+          <p:cNvPr id="6" name="Picture 5">
+            <a:extLst>
+              <a:ext uri="{FF2B5EF4-FFF2-40B4-BE49-F238E27FC236}">
+                <a16:creationId xmlns:a16="http://schemas.microsoft.com/office/drawing/2014/main" id="{B35C721C-57AC-D1EA-226B-0FD743CF6C9B}"/>
+              </a:ext>
+            </a:extLst>
+          </p:cNvPr>
+          <p:cNvPicPr>
+            <a:picLocks noChangeAspect="1"/>
+          </p:cNvPicPr>
+          <p:nvPr/>
+        </p:nvPicPr>
+        <p:blipFill>
+          <a:blip r:embed="rId2"/>
+          <a:stretch>
+            <a:fillRect/>
+          </a:stretch>
+        </p:blipFill>
+        <p:spPr>
+          <a:xfrm>
+            <a:off x="0" y="4297680"/>
+            <a:ext cx="9144000" cy="2446986"/>
+          </a:xfrm>
+          <a:prstGeom prst="rect">
+            <a:avLst/>
+          </a:prstGeom>
+        </p:spPr>
+      </p:pic>
+    </p:spTree>
+    <p:extLst>
+      <p:ext uri="{BB962C8B-B14F-4D97-AF65-F5344CB8AC3E}">
+        <p14:creationId xmlns:p14="http://schemas.microsoft.com/office/powerpoint/2010/main" val="3043562984"/>
+      </p:ext>
+    </p:extLst>
+  </p:cSld>
+  <p:clrMapOvr>
+    <a:masterClrMapping/>
+  </p:clrMapOvr>
+</p:sld>
+</file>
+
+<file path=ppt/slides/slide21.xml><?xml version="1.0" encoding="utf-8"?>
+<p:sld xmlns:a="http://schemas.openxmlformats.org/drawingml/2006/main" xmlns:r="http://schemas.openxmlformats.org/officeDocument/2006/relationships" xmlns:p="http://schemas.openxmlformats.org/presentationml/2006/main">
+  <p:cSld>
+    <p:spTree>
+      <p:nvGrpSpPr>
+        <p:cNvPr id="1" name=""/>
+        <p:cNvGrpSpPr/>
+        <p:nvPr/>
+      </p:nvGrpSpPr>
+      <p:grpSpPr>
+        <a:xfrm>
+          <a:off x="0" y="0"/>
+          <a:ext cx="0" cy="0"/>
+          <a:chOff x="0" y="0"/>
+          <a:chExt cx="0" cy="0"/>
+        </a:xfrm>
+      </p:grpSpPr>
+      <p:sp>
+        <p:nvSpPr>
+          <p:cNvPr id="2" name="Title 1">
+            <a:extLst>
+              <a:ext uri="{FF2B5EF4-FFF2-40B4-BE49-F238E27FC236}">
                 <a16:creationId xmlns:a16="http://schemas.microsoft.com/office/drawing/2014/main" id="{857E4BAE-78E7-7C88-FFB9-E83FE9DBFAD8}"/>
               </a:ext>
             </a:extLst>
@@ -18270,7 +18405,7 @@
 </p:sld>
 </file>
 
-<file path=ppt/slides/slide21.xml><?xml version="1.0" encoding="utf-8"?>
+<file path=ppt/slides/slide22.xml><?xml version="1.0" encoding="utf-8"?>
 <p:sld xmlns:a="http://schemas.openxmlformats.org/drawingml/2006/main" xmlns:r="http://schemas.openxmlformats.org/officeDocument/2006/relationships" xmlns:p="http://schemas.openxmlformats.org/presentationml/2006/main">
   <p:cSld>
     <p:spTree>
@@ -18448,7 +18583,7 @@
 </p:sld>
 </file>
 
-<file path=ppt/slides/slide22.xml><?xml version="1.0" encoding="utf-8"?>
+<file path=ppt/slides/slide23.xml><?xml version="1.0" encoding="utf-8"?>
 <p:sld xmlns:a="http://schemas.openxmlformats.org/drawingml/2006/main" xmlns:r="http://schemas.openxmlformats.org/officeDocument/2006/relationships" xmlns:p="http://schemas.openxmlformats.org/presentationml/2006/main">
   <p:cSld>
     <p:spTree>
@@ -18588,7 +18723,7 @@
 </p:sld>
 </file>
 
-<file path=ppt/slides/slide23.xml><?xml version="1.0" encoding="utf-8"?>
+<file path=ppt/slides/slide24.xml><?xml version="1.0" encoding="utf-8"?>
 <p:sld xmlns:a="http://schemas.openxmlformats.org/drawingml/2006/main" xmlns:r="http://schemas.openxmlformats.org/officeDocument/2006/relationships" xmlns:p="http://schemas.openxmlformats.org/presentationml/2006/main">
   <p:cSld>
     <p:spTree>
@@ -18785,7 +18920,98 @@
 </p:sld>
 </file>
 
-<file path=ppt/slides/slide24.xml><?xml version="1.0" encoding="utf-8"?>
+<file path=ppt/slides/slide25.xml><?xml version="1.0" encoding="utf-8"?>
+<p:sld xmlns:a="http://schemas.openxmlformats.org/drawingml/2006/main" xmlns:r="http://schemas.openxmlformats.org/officeDocument/2006/relationships" xmlns:p="http://schemas.openxmlformats.org/presentationml/2006/main">
+  <p:cSld>
+    <p:spTree>
+      <p:nvGrpSpPr>
+        <p:cNvPr id="1" name=""/>
+        <p:cNvGrpSpPr/>
+        <p:nvPr/>
+      </p:nvGrpSpPr>
+      <p:grpSpPr>
+        <a:xfrm>
+          <a:off x="0" y="0"/>
+          <a:ext cx="0" cy="0"/>
+          <a:chOff x="0" y="0"/>
+          <a:chExt cx="0" cy="0"/>
+        </a:xfrm>
+      </p:grpSpPr>
+      <p:sp>
+        <p:nvSpPr>
+          <p:cNvPr id="2" name="Title 1">
+            <a:extLst>
+              <a:ext uri="{FF2B5EF4-FFF2-40B4-BE49-F238E27FC236}">
+                <a16:creationId xmlns:a16="http://schemas.microsoft.com/office/drawing/2014/main" id="{1B0575FC-6F06-FBC4-DBC0-8EF7E6F283AB}"/>
+              </a:ext>
+            </a:extLst>
+          </p:cNvPr>
+          <p:cNvSpPr>
+            <a:spLocks noGrp="1"/>
+          </p:cNvSpPr>
+          <p:nvPr>
+            <p:ph type="title"/>
+          </p:nvPr>
+        </p:nvSpPr>
+        <p:spPr/>
+        <p:txBody>
+          <a:bodyPr/>
+          <a:lstStyle/>
+          <a:p>
+            <a:r>
+              <a:rPr lang="en-US"/>
+              <a:t>Models</a:t>
+            </a:r>
+            <a:endParaRPr lang="en-IN"/>
+          </a:p>
+        </p:txBody>
+      </p:sp>
+      <p:pic>
+        <p:nvPicPr>
+          <p:cNvPr id="5" name="Content Placeholder 4">
+            <a:extLst>
+              <a:ext uri="{FF2B5EF4-FFF2-40B4-BE49-F238E27FC236}">
+                <a16:creationId xmlns:a16="http://schemas.microsoft.com/office/drawing/2014/main" id="{41430E58-7DE4-B050-86D2-D01FB211DE11}"/>
+              </a:ext>
+            </a:extLst>
+          </p:cNvPr>
+          <p:cNvPicPr>
+            <a:picLocks noGrp="1" noChangeAspect="1"/>
+          </p:cNvPicPr>
+          <p:nvPr>
+            <p:ph idx="1"/>
+          </p:nvPr>
+        </p:nvPicPr>
+        <p:blipFill>
+          <a:blip r:embed="rId2"/>
+          <a:stretch>
+            <a:fillRect/>
+          </a:stretch>
+        </p:blipFill>
+        <p:spPr>
+          <a:xfrm>
+            <a:off x="768350" y="3319866"/>
+            <a:ext cx="7289800" cy="1954992"/>
+          </a:xfrm>
+          <a:prstGeom prst="rect">
+            <a:avLst/>
+          </a:prstGeom>
+        </p:spPr>
+      </p:pic>
+    </p:spTree>
+    <p:extLst>
+      <p:ext uri="{BB962C8B-B14F-4D97-AF65-F5344CB8AC3E}">
+        <p14:creationId xmlns:p14="http://schemas.microsoft.com/office/powerpoint/2010/main" val="814320555"/>
+      </p:ext>
+    </p:extLst>
+  </p:cSld>
+  <p:clrMapOvr>
+    <a:masterClrMapping/>
+  </p:clrMapOvr>
+</p:sld>
+</file>
+
+<file path=ppt/slides/slide26.xml><?xml version="1.0" encoding="utf-8"?>
 <p:sld xmlns:a="http://schemas.openxmlformats.org/drawingml/2006/main" xmlns:r="http://schemas.openxmlformats.org/officeDocument/2006/relationships" xmlns:p="http://schemas.openxmlformats.org/presentationml/2006/main">
   <p:cSld>
     <p:spTree>
@@ -18902,7 +19128,7 @@
 </p:sld>
 </file>
 
-<file path=ppt/slides/slide25.xml><?xml version="1.0" encoding="utf-8"?>
+<file path=ppt/slides/slide27.xml><?xml version="1.0" encoding="utf-8"?>
 <p:sld xmlns:a="http://schemas.openxmlformats.org/drawingml/2006/main" xmlns:r="http://schemas.openxmlformats.org/officeDocument/2006/relationships" xmlns:p="http://schemas.openxmlformats.org/presentationml/2006/main">
   <p:cSld>
     <p:spTree>
@@ -19055,7 +19281,7 @@
 </p:sld>
 </file>
 
-<file path=ppt/slides/slide26.xml><?xml version="1.0" encoding="utf-8"?>
+<file path=ppt/slides/slide28.xml><?xml version="1.0" encoding="utf-8"?>
 <p:sld xmlns:a="http://schemas.openxmlformats.org/drawingml/2006/main" xmlns:r="http://schemas.openxmlformats.org/officeDocument/2006/relationships" xmlns:p="http://schemas.openxmlformats.org/presentationml/2006/main">
   <p:cSld>
     <p:spTree>
@@ -19228,7 +19454,7 @@
 </p:sld>
 </file>
 
-<file path=ppt/slides/slide27.xml><?xml version="1.0" encoding="utf-8"?>
+<file path=ppt/slides/slide29.xml><?xml version="1.0" encoding="utf-8"?>
 <p:sld xmlns:a="http://schemas.openxmlformats.org/drawingml/2006/main" xmlns:r="http://schemas.openxmlformats.org/officeDocument/2006/relationships" xmlns:p="http://schemas.openxmlformats.org/presentationml/2006/main">
   <p:cSld>
     <p:spTree>
@@ -19401,230 +19627,6 @@
     <p:extLst>
       <p:ext uri="{BB962C8B-B14F-4D97-AF65-F5344CB8AC3E}">
         <p14:creationId xmlns:p14="http://schemas.microsoft.com/office/powerpoint/2010/main" val="1218241180"/>
-      </p:ext>
-    </p:extLst>
-  </p:cSld>
-  <p:clrMapOvr>
-    <a:masterClrMapping/>
-  </p:clrMapOvr>
-</p:sld>
-</file>
-
-<file path=ppt/slides/slide28.xml><?xml version="1.0" encoding="utf-8"?>
-<p:sld xmlns:a="http://schemas.openxmlformats.org/drawingml/2006/main" xmlns:r="http://schemas.openxmlformats.org/officeDocument/2006/relationships" xmlns:p="http://schemas.openxmlformats.org/presentationml/2006/main">
-  <p:cSld>
-    <p:spTree>
-      <p:nvGrpSpPr>
-        <p:cNvPr id="1" name=""/>
-        <p:cNvGrpSpPr/>
-        <p:nvPr/>
-      </p:nvGrpSpPr>
-      <p:grpSpPr>
-        <a:xfrm>
-          <a:off x="0" y="0"/>
-          <a:ext cx="0" cy="0"/>
-          <a:chOff x="0" y="0"/>
-          <a:chExt cx="0" cy="0"/>
-        </a:xfrm>
-      </p:grpSpPr>
-      <p:sp>
-        <p:nvSpPr>
-          <p:cNvPr id="2" name="Title 1"/>
-          <p:cNvSpPr>
-            <a:spLocks noGrp="1"/>
-          </p:cNvSpPr>
-          <p:nvPr>
-            <p:ph type="title"/>
-          </p:nvPr>
-        </p:nvSpPr>
-        <p:spPr/>
-        <p:txBody>
-          <a:bodyPr/>
-          <a:lstStyle/>
-          <a:p>
-            <a:r>
-              <a:t>dbt Testing</a:t>
-            </a:r>
-          </a:p>
-        </p:txBody>
-      </p:sp>
-      <p:sp>
-        <p:nvSpPr>
-          <p:cNvPr id="3" name="Content Placeholder 2"/>
-          <p:cNvSpPr>
-            <a:spLocks noGrp="1"/>
-          </p:cNvSpPr>
-          <p:nvPr>
-            <p:ph idx="1"/>
-          </p:nvPr>
-        </p:nvSpPr>
-        <p:spPr/>
-        <p:txBody>
-          <a:bodyPr/>
-          <a:lstStyle/>
-          <a:p>
-            <a:r>
-              <a:rPr lang="en-US" b="1" dirty="0" err="1"/>
-              <a:t>dbt</a:t>
-            </a:r>
-            <a:r>
-              <a:rPr lang="en-US" b="1" dirty="0"/>
-              <a:t> testing</a:t>
-            </a:r>
-            <a:r>
-              <a:rPr lang="en-US" dirty="0"/>
-              <a:t> ensures that your data is </a:t>
-            </a:r>
-            <a:r>
-              <a:rPr lang="en-US" b="1" dirty="0"/>
-              <a:t>correct, clean, and reliable</a:t>
-            </a:r>
-            <a:r>
-              <a:rPr lang="en-US" dirty="0"/>
-              <a:t> by running checks on your models.</a:t>
-            </a:r>
-          </a:p>
-          <a:p>
-            <a:r>
-              <a:rPr lang="en-US" dirty="0"/>
-              <a:t>Instead of trusting data blindly, </a:t>
-            </a:r>
-            <a:r>
-              <a:rPr lang="en-US" dirty="0" err="1"/>
-              <a:t>dbt</a:t>
-            </a:r>
-            <a:r>
-              <a:rPr lang="en-US" dirty="0"/>
-              <a:t> lets you define </a:t>
-            </a:r>
-            <a:r>
-              <a:rPr lang="en-US" b="1" dirty="0"/>
-              <a:t>rules (tests)</a:t>
-            </a:r>
-            <a:r>
-              <a:rPr lang="en-US" dirty="0"/>
-              <a:t> like:</a:t>
-            </a:r>
-          </a:p>
-          <a:p>
-            <a:r>
-              <a:rPr lang="en-US" dirty="0"/>
-              <a:t>No nulls </a:t>
-            </a:r>
-          </a:p>
-          <a:p>
-            <a:r>
-              <a:rPr lang="en-US" dirty="0"/>
-              <a:t>No duplicates </a:t>
-            </a:r>
-          </a:p>
-          <a:p>
-            <a:r>
-              <a:rPr lang="en-US" dirty="0"/>
-              <a:t>Valid relationships </a:t>
-            </a:r>
-          </a:p>
-        </p:txBody>
-      </p:sp>
-    </p:spTree>
-  </p:cSld>
-  <p:clrMapOvr>
-    <a:masterClrMapping/>
-  </p:clrMapOvr>
-</p:sld>
-</file>
-
-<file path=ppt/slides/slide29.xml><?xml version="1.0" encoding="utf-8"?>
-<p:sld xmlns:a="http://schemas.openxmlformats.org/drawingml/2006/main" xmlns:r="http://schemas.openxmlformats.org/officeDocument/2006/relationships" xmlns:p="http://schemas.openxmlformats.org/presentationml/2006/main">
-  <p:cSld>
-    <p:spTree>
-      <p:nvGrpSpPr>
-        <p:cNvPr id="1" name=""/>
-        <p:cNvGrpSpPr/>
-        <p:nvPr/>
-      </p:nvGrpSpPr>
-      <p:grpSpPr>
-        <a:xfrm>
-          <a:off x="0" y="0"/>
-          <a:ext cx="0" cy="0"/>
-          <a:chOff x="0" y="0"/>
-          <a:chExt cx="0" cy="0"/>
-        </a:xfrm>
-      </p:grpSpPr>
-      <p:sp>
-        <p:nvSpPr>
-          <p:cNvPr id="2" name="Title 1">
-            <a:extLst>
-              <a:ext uri="{FF2B5EF4-FFF2-40B4-BE49-F238E27FC236}">
-                <a16:creationId xmlns:a16="http://schemas.microsoft.com/office/drawing/2014/main" id="{E601048E-1F75-F895-1F3A-5EA125BA1053}"/>
-              </a:ext>
-            </a:extLst>
-          </p:cNvPr>
-          <p:cNvSpPr>
-            <a:spLocks noGrp="1"/>
-          </p:cNvSpPr>
-          <p:nvPr>
-            <p:ph type="title"/>
-          </p:nvPr>
-        </p:nvSpPr>
-        <p:spPr/>
-        <p:txBody>
-          <a:bodyPr/>
-          <a:lstStyle/>
-          <a:p>
-            <a:r>
-              <a:rPr lang="en-IN" dirty="0"/>
-              <a:t>Types of </a:t>
-            </a:r>
-            <a:r>
-              <a:rPr lang="en-IN" dirty="0" err="1"/>
-              <a:t>dbt</a:t>
-            </a:r>
-            <a:r>
-              <a:rPr lang="en-IN" dirty="0"/>
-              <a:t> Tests</a:t>
-            </a:r>
-          </a:p>
-        </p:txBody>
-      </p:sp>
-      <p:sp>
-        <p:nvSpPr>
-          <p:cNvPr id="3" name="Content Placeholder 2">
-            <a:extLst>
-              <a:ext uri="{FF2B5EF4-FFF2-40B4-BE49-F238E27FC236}">
-                <a16:creationId xmlns:a16="http://schemas.microsoft.com/office/drawing/2014/main" id="{ED523E29-9BE0-DEEF-2D7C-2CC189F5C3B8}"/>
-              </a:ext>
-            </a:extLst>
-          </p:cNvPr>
-          <p:cNvSpPr>
-            <a:spLocks noGrp="1"/>
-          </p:cNvSpPr>
-          <p:nvPr>
-            <p:ph idx="1"/>
-          </p:nvPr>
-        </p:nvSpPr>
-        <p:spPr/>
-        <p:txBody>
-          <a:bodyPr/>
-          <a:lstStyle/>
-          <a:p>
-            <a:r>
-              <a:rPr lang="en-IN" dirty="0"/>
-              <a:t>Generic Tests (Built-in)</a:t>
-            </a:r>
-          </a:p>
-          <a:p>
-            <a:r>
-              <a:rPr lang="en-IN" dirty="0"/>
-              <a:t>Singular Tests (Custom SQL)</a:t>
-            </a:r>
-          </a:p>
-        </p:txBody>
-      </p:sp>
-    </p:spTree>
-    <p:extLst>
-      <p:ext uri="{BB962C8B-B14F-4D97-AF65-F5344CB8AC3E}">
-        <p14:creationId xmlns:p14="http://schemas.microsoft.com/office/powerpoint/2010/main" val="1919559536"/>
       </p:ext>
     </p:extLst>
   </p:cSld>
@@ -19730,6 +19732,230 @@
       </p:grpSpPr>
       <p:sp>
         <p:nvSpPr>
+          <p:cNvPr id="2" name="Title 1"/>
+          <p:cNvSpPr>
+            <a:spLocks noGrp="1"/>
+          </p:cNvSpPr>
+          <p:nvPr>
+            <p:ph type="title"/>
+          </p:nvPr>
+        </p:nvSpPr>
+        <p:spPr/>
+        <p:txBody>
+          <a:bodyPr/>
+          <a:lstStyle/>
+          <a:p>
+            <a:r>
+              <a:t>dbt Testing</a:t>
+            </a:r>
+          </a:p>
+        </p:txBody>
+      </p:sp>
+      <p:sp>
+        <p:nvSpPr>
+          <p:cNvPr id="3" name="Content Placeholder 2"/>
+          <p:cNvSpPr>
+            <a:spLocks noGrp="1"/>
+          </p:cNvSpPr>
+          <p:nvPr>
+            <p:ph idx="1"/>
+          </p:nvPr>
+        </p:nvSpPr>
+        <p:spPr/>
+        <p:txBody>
+          <a:bodyPr/>
+          <a:lstStyle/>
+          <a:p>
+            <a:r>
+              <a:rPr lang="en-US" b="1" dirty="0" err="1"/>
+              <a:t>dbt</a:t>
+            </a:r>
+            <a:r>
+              <a:rPr lang="en-US" b="1" dirty="0"/>
+              <a:t> testing</a:t>
+            </a:r>
+            <a:r>
+              <a:rPr lang="en-US" dirty="0"/>
+              <a:t> ensures that your data is </a:t>
+            </a:r>
+            <a:r>
+              <a:rPr lang="en-US" b="1" dirty="0"/>
+              <a:t>correct, clean, and reliable</a:t>
+            </a:r>
+            <a:r>
+              <a:rPr lang="en-US" dirty="0"/>
+              <a:t> by running checks on your models.</a:t>
+            </a:r>
+          </a:p>
+          <a:p>
+            <a:r>
+              <a:rPr lang="en-US" dirty="0"/>
+              <a:t>Instead of trusting data blindly, </a:t>
+            </a:r>
+            <a:r>
+              <a:rPr lang="en-US" dirty="0" err="1"/>
+              <a:t>dbt</a:t>
+            </a:r>
+            <a:r>
+              <a:rPr lang="en-US" dirty="0"/>
+              <a:t> lets you define </a:t>
+            </a:r>
+            <a:r>
+              <a:rPr lang="en-US" b="1" dirty="0"/>
+              <a:t>rules (tests)</a:t>
+            </a:r>
+            <a:r>
+              <a:rPr lang="en-US" dirty="0"/>
+              <a:t> like:</a:t>
+            </a:r>
+          </a:p>
+          <a:p>
+            <a:r>
+              <a:rPr lang="en-US" dirty="0"/>
+              <a:t>No nulls </a:t>
+            </a:r>
+          </a:p>
+          <a:p>
+            <a:r>
+              <a:rPr lang="en-US" dirty="0"/>
+              <a:t>No duplicates </a:t>
+            </a:r>
+          </a:p>
+          <a:p>
+            <a:r>
+              <a:rPr lang="en-US" dirty="0"/>
+              <a:t>Valid relationships </a:t>
+            </a:r>
+          </a:p>
+        </p:txBody>
+      </p:sp>
+    </p:spTree>
+  </p:cSld>
+  <p:clrMapOvr>
+    <a:masterClrMapping/>
+  </p:clrMapOvr>
+</p:sld>
+</file>
+
+<file path=ppt/slides/slide31.xml><?xml version="1.0" encoding="utf-8"?>
+<p:sld xmlns:a="http://schemas.openxmlformats.org/drawingml/2006/main" xmlns:r="http://schemas.openxmlformats.org/officeDocument/2006/relationships" xmlns:p="http://schemas.openxmlformats.org/presentationml/2006/main">
+  <p:cSld>
+    <p:spTree>
+      <p:nvGrpSpPr>
+        <p:cNvPr id="1" name=""/>
+        <p:cNvGrpSpPr/>
+        <p:nvPr/>
+      </p:nvGrpSpPr>
+      <p:grpSpPr>
+        <a:xfrm>
+          <a:off x="0" y="0"/>
+          <a:ext cx="0" cy="0"/>
+          <a:chOff x="0" y="0"/>
+          <a:chExt cx="0" cy="0"/>
+        </a:xfrm>
+      </p:grpSpPr>
+      <p:sp>
+        <p:nvSpPr>
+          <p:cNvPr id="2" name="Title 1">
+            <a:extLst>
+              <a:ext uri="{FF2B5EF4-FFF2-40B4-BE49-F238E27FC236}">
+                <a16:creationId xmlns:a16="http://schemas.microsoft.com/office/drawing/2014/main" id="{E601048E-1F75-F895-1F3A-5EA125BA1053}"/>
+              </a:ext>
+            </a:extLst>
+          </p:cNvPr>
+          <p:cNvSpPr>
+            <a:spLocks noGrp="1"/>
+          </p:cNvSpPr>
+          <p:nvPr>
+            <p:ph type="title"/>
+          </p:nvPr>
+        </p:nvSpPr>
+        <p:spPr/>
+        <p:txBody>
+          <a:bodyPr/>
+          <a:lstStyle/>
+          <a:p>
+            <a:r>
+              <a:rPr lang="en-IN" dirty="0"/>
+              <a:t>Types of </a:t>
+            </a:r>
+            <a:r>
+              <a:rPr lang="en-IN" dirty="0" err="1"/>
+              <a:t>dbt</a:t>
+            </a:r>
+            <a:r>
+              <a:rPr lang="en-IN" dirty="0"/>
+              <a:t> Tests</a:t>
+            </a:r>
+          </a:p>
+        </p:txBody>
+      </p:sp>
+      <p:sp>
+        <p:nvSpPr>
+          <p:cNvPr id="3" name="Content Placeholder 2">
+            <a:extLst>
+              <a:ext uri="{FF2B5EF4-FFF2-40B4-BE49-F238E27FC236}">
+                <a16:creationId xmlns:a16="http://schemas.microsoft.com/office/drawing/2014/main" id="{ED523E29-9BE0-DEEF-2D7C-2CC189F5C3B8}"/>
+              </a:ext>
+            </a:extLst>
+          </p:cNvPr>
+          <p:cNvSpPr>
+            <a:spLocks noGrp="1"/>
+          </p:cNvSpPr>
+          <p:nvPr>
+            <p:ph idx="1"/>
+          </p:nvPr>
+        </p:nvSpPr>
+        <p:spPr/>
+        <p:txBody>
+          <a:bodyPr/>
+          <a:lstStyle/>
+          <a:p>
+            <a:r>
+              <a:rPr lang="en-IN" dirty="0"/>
+              <a:t>Generic Tests (Built-in)</a:t>
+            </a:r>
+          </a:p>
+          <a:p>
+            <a:r>
+              <a:rPr lang="en-IN" dirty="0"/>
+              <a:t>Singular Tests (Custom SQL)</a:t>
+            </a:r>
+          </a:p>
+        </p:txBody>
+      </p:sp>
+    </p:spTree>
+    <p:extLst>
+      <p:ext uri="{BB962C8B-B14F-4D97-AF65-F5344CB8AC3E}">
+        <p14:creationId xmlns:p14="http://schemas.microsoft.com/office/powerpoint/2010/main" val="1919559536"/>
+      </p:ext>
+    </p:extLst>
+  </p:cSld>
+  <p:clrMapOvr>
+    <a:masterClrMapping/>
+  </p:clrMapOvr>
+</p:sld>
+</file>
+
+<file path=ppt/slides/slide32.xml><?xml version="1.0" encoding="utf-8"?>
+<p:sld xmlns:a="http://schemas.openxmlformats.org/drawingml/2006/main" xmlns:r="http://schemas.openxmlformats.org/officeDocument/2006/relationships" xmlns:p="http://schemas.openxmlformats.org/presentationml/2006/main">
+  <p:cSld>
+    <p:spTree>
+      <p:nvGrpSpPr>
+        <p:cNvPr id="1" name=""/>
+        <p:cNvGrpSpPr/>
+        <p:nvPr/>
+      </p:nvGrpSpPr>
+      <p:grpSpPr>
+        <a:xfrm>
+          <a:off x="0" y="0"/>
+          <a:ext cx="0" cy="0"/>
+          <a:chOff x="0" y="0"/>
+          <a:chExt cx="0" cy="0"/>
+        </a:xfrm>
+      </p:grpSpPr>
+      <p:sp>
+        <p:nvSpPr>
           <p:cNvPr id="2" name="Title 1">
             <a:extLst>
               <a:ext uri="{FF2B5EF4-FFF2-40B4-BE49-F238E27FC236}">
@@ -19909,7 +20135,7 @@
 </p:sld>
 </file>
 
-<file path=ppt/slides/slide31.xml><?xml version="1.0" encoding="utf-8"?>
+<file path=ppt/slides/slide33.xml><?xml version="1.0" encoding="utf-8"?>
 <p:sld xmlns:a="http://schemas.openxmlformats.org/drawingml/2006/main" xmlns:r="http://schemas.openxmlformats.org/officeDocument/2006/relationships" xmlns:p="http://schemas.openxmlformats.org/presentationml/2006/main">
   <p:cSld>
     <p:spTree>
@@ -20124,7 +20350,7 @@
 </p:sld>
 </file>
 
-<file path=ppt/slides/slide32.xml><?xml version="1.0" encoding="utf-8"?>
+<file path=ppt/slides/slide34.xml><?xml version="1.0" encoding="utf-8"?>
 <p:sld xmlns:a="http://schemas.openxmlformats.org/drawingml/2006/main" xmlns:r="http://schemas.openxmlformats.org/officeDocument/2006/relationships" xmlns:p="http://schemas.openxmlformats.org/presentationml/2006/main">
   <p:cSld>
     <p:spTree>
@@ -20267,7 +20493,7 @@
 </p:sld>
 </file>
 
-<file path=ppt/slides/slide33.xml><?xml version="1.0" encoding="utf-8"?>
+<file path=ppt/slides/slide35.xml><?xml version="1.0" encoding="utf-8"?>
 <p:sld xmlns:a="http://schemas.openxmlformats.org/drawingml/2006/main" xmlns:r="http://schemas.openxmlformats.org/officeDocument/2006/relationships" xmlns:p="http://schemas.openxmlformats.org/presentationml/2006/main">
   <p:cSld>
     <p:spTree>
@@ -20416,7 +20642,7 @@
 </p:sld>
 </file>
 
-<file path=ppt/slides/slide34.xml><?xml version="1.0" encoding="utf-8"?>
+<file path=ppt/slides/slide36.xml><?xml version="1.0" encoding="utf-8"?>
 <p:sld xmlns:a="http://schemas.openxmlformats.org/drawingml/2006/main" xmlns:r="http://schemas.openxmlformats.org/officeDocument/2006/relationships" xmlns:p="http://schemas.openxmlformats.org/presentationml/2006/main">
   <p:cSld>
     <p:spTree>
@@ -20557,7 +20783,7 @@
 </p:sld>
 </file>
 
-<file path=ppt/slides/slide35.xml><?xml version="1.0" encoding="utf-8"?>
+<file path=ppt/slides/slide37.xml><?xml version="1.0" encoding="utf-8"?>
 <p:sld xmlns:a="http://schemas.openxmlformats.org/drawingml/2006/main" xmlns:r="http://schemas.openxmlformats.org/officeDocument/2006/relationships" xmlns:p="http://schemas.openxmlformats.org/presentationml/2006/main">
   <p:cSld>
     <p:spTree>
@@ -20760,7 +20986,7 @@
 </p:sld>
 </file>
 
-<file path=ppt/slides/slide36.xml><?xml version="1.0" encoding="utf-8"?>
+<file path=ppt/slides/slide38.xml><?xml version="1.0" encoding="utf-8"?>
 <p:sld xmlns:a="http://schemas.openxmlformats.org/drawingml/2006/main" xmlns:r="http://schemas.openxmlformats.org/officeDocument/2006/relationships" xmlns:p="http://schemas.openxmlformats.org/presentationml/2006/main">
   <p:cSld>
     <p:spTree>
@@ -20944,7 +21170,7 @@
 </p:sld>
 </file>
 
-<file path=ppt/slides/slide37.xml><?xml version="1.0" encoding="utf-8"?>
+<file path=ppt/slides/slide39.xml><?xml version="1.0" encoding="utf-8"?>
 <p:sld xmlns:a="http://schemas.openxmlformats.org/drawingml/2006/main" xmlns:r="http://schemas.openxmlformats.org/officeDocument/2006/relationships" xmlns:p="http://schemas.openxmlformats.org/presentationml/2006/main">
   <p:cSld>
     <p:spTree>
@@ -21091,417 +21317,6 @@
     <p:extLst>
       <p:ext uri="{BB962C8B-B14F-4D97-AF65-F5344CB8AC3E}">
         <p14:creationId xmlns:p14="http://schemas.microsoft.com/office/powerpoint/2010/main" val="595692326"/>
-      </p:ext>
-    </p:extLst>
-  </p:cSld>
-  <p:clrMapOvr>
-    <a:masterClrMapping/>
-  </p:clrMapOvr>
-</p:sld>
-</file>
-
-<file path=ppt/slides/slide38.xml><?xml version="1.0" encoding="utf-8"?>
-<p:sld xmlns:a="http://schemas.openxmlformats.org/drawingml/2006/main" xmlns:r="http://schemas.openxmlformats.org/officeDocument/2006/relationships" xmlns:p="http://schemas.openxmlformats.org/presentationml/2006/main">
-  <p:cSld>
-    <p:spTree>
-      <p:nvGrpSpPr>
-        <p:cNvPr id="1" name=""/>
-        <p:cNvGrpSpPr/>
-        <p:nvPr/>
-      </p:nvGrpSpPr>
-      <p:grpSpPr>
-        <a:xfrm>
-          <a:off x="0" y="0"/>
-          <a:ext cx="0" cy="0"/>
-          <a:chOff x="0" y="0"/>
-          <a:chExt cx="0" cy="0"/>
-        </a:xfrm>
-      </p:grpSpPr>
-      <p:sp>
-        <p:nvSpPr>
-          <p:cNvPr id="2" name="Title 1"/>
-          <p:cNvSpPr>
-            <a:spLocks noGrp="1"/>
-          </p:cNvSpPr>
-          <p:nvPr>
-            <p:ph type="title"/>
-          </p:nvPr>
-        </p:nvSpPr>
-        <p:spPr/>
-        <p:txBody>
-          <a:bodyPr/>
-          <a:lstStyle/>
-          <a:p>
-            <a:r>
-              <a:rPr dirty="0"/>
-              <a:t>SQL Code Review Agent</a:t>
-            </a:r>
-          </a:p>
-        </p:txBody>
-      </p:sp>
-      <p:sp>
-        <p:nvSpPr>
-          <p:cNvPr id="3" name="Content Placeholder 2"/>
-          <p:cNvSpPr>
-            <a:spLocks noGrp="1"/>
-          </p:cNvSpPr>
-          <p:nvPr>
-            <p:ph idx="1"/>
-          </p:nvPr>
-        </p:nvSpPr>
-        <p:spPr/>
-        <p:txBody>
-          <a:bodyPr>
-            <a:normAutofit fontScale="92500" lnSpcReduction="20000"/>
-          </a:bodyPr>
-          <a:lstStyle/>
-          <a:p>
-            <a:r>
-              <a:rPr lang="en-US" dirty="0"/>
-              <a:t>A </a:t>
-            </a:r>
-            <a:r>
-              <a:rPr lang="en-US" b="1" dirty="0"/>
-              <a:t>SQL Code Review Agent</a:t>
-            </a:r>
-            <a:r>
-              <a:rPr lang="en-US" dirty="0"/>
-              <a:t> is an AI-powered assistant that automatically reviews SQL queries to ensure they are:</a:t>
-            </a:r>
-          </a:p>
-          <a:p>
-            <a:r>
-              <a:rPr lang="en-US" b="1" dirty="0"/>
-              <a:t>Correct</a:t>
-            </a:r>
-            <a:r>
-              <a:rPr lang="en-US" dirty="0"/>
-              <a:t> </a:t>
-            </a:r>
-          </a:p>
-          <a:p>
-            <a:r>
-              <a:rPr lang="en-US" b="1" dirty="0"/>
-              <a:t>Efficient</a:t>
-            </a:r>
-            <a:r>
-              <a:rPr lang="en-US" dirty="0"/>
-              <a:t> </a:t>
-            </a:r>
-          </a:p>
-          <a:p>
-            <a:r>
-              <a:rPr lang="en-US" b="1" dirty="0"/>
-              <a:t>Secure</a:t>
-            </a:r>
-            <a:r>
-              <a:rPr lang="en-US" dirty="0"/>
-              <a:t> </a:t>
-            </a:r>
-          </a:p>
-          <a:p>
-            <a:r>
-              <a:rPr lang="en-US" b="1" dirty="0"/>
-              <a:t>Readable</a:t>
-            </a:r>
-            <a:r>
-              <a:rPr lang="en-US" dirty="0"/>
-              <a:t> </a:t>
-            </a:r>
-          </a:p>
-          <a:p>
-            <a:r>
-              <a:rPr lang="en-US" dirty="0"/>
-              <a:t>It acts like a </a:t>
-            </a:r>
-            <a:r>
-              <a:rPr lang="en-US" b="1" dirty="0"/>
-              <a:t>senior data engineer reviewing your SQL</a:t>
-            </a:r>
-            <a:r>
-              <a:rPr lang="en-US" dirty="0"/>
-              <a:t>, but instantly.</a:t>
-            </a:r>
-          </a:p>
-          <a:p>
-            <a:pPr marL="0" indent="0">
-              <a:buNone/>
-            </a:pPr>
-            <a:endParaRPr lang="en-IN" dirty="0"/>
-          </a:p>
-          <a:p>
-            <a:r>
-              <a:rPr dirty="0"/>
-              <a:t>Security checks</a:t>
-            </a:r>
-          </a:p>
-          <a:p>
-            <a:r>
-              <a:rPr dirty="0"/>
-              <a:t>Performance tuning</a:t>
-            </a:r>
-          </a:p>
-          <a:p>
-            <a:r>
-              <a:rPr dirty="0"/>
-              <a:t>Code readability</a:t>
-            </a:r>
-          </a:p>
-        </p:txBody>
-      </p:sp>
-    </p:spTree>
-  </p:cSld>
-  <p:clrMapOvr>
-    <a:masterClrMapping/>
-  </p:clrMapOvr>
-</p:sld>
-</file>
-
-<file path=ppt/slides/slide39.xml><?xml version="1.0" encoding="utf-8"?>
-<p:sld xmlns:a="http://schemas.openxmlformats.org/drawingml/2006/main" xmlns:r="http://schemas.openxmlformats.org/officeDocument/2006/relationships" xmlns:p="http://schemas.openxmlformats.org/presentationml/2006/main">
-  <p:cSld>
-    <p:spTree>
-      <p:nvGrpSpPr>
-        <p:cNvPr id="1" name=""/>
-        <p:cNvGrpSpPr/>
-        <p:nvPr/>
-      </p:nvGrpSpPr>
-      <p:grpSpPr>
-        <a:xfrm>
-          <a:off x="0" y="0"/>
-          <a:ext cx="0" cy="0"/>
-          <a:chOff x="0" y="0"/>
-          <a:chExt cx="0" cy="0"/>
-        </a:xfrm>
-      </p:grpSpPr>
-      <p:sp>
-        <p:nvSpPr>
-          <p:cNvPr id="2" name="Title 1">
-            <a:extLst>
-              <a:ext uri="{FF2B5EF4-FFF2-40B4-BE49-F238E27FC236}">
-                <a16:creationId xmlns:a16="http://schemas.microsoft.com/office/drawing/2014/main" id="{1E76E9CE-19B4-4378-7B5C-1506335AA9F7}"/>
-              </a:ext>
-            </a:extLst>
-          </p:cNvPr>
-          <p:cNvSpPr>
-            <a:spLocks noGrp="1"/>
-          </p:cNvSpPr>
-          <p:nvPr>
-            <p:ph type="title"/>
-          </p:nvPr>
-        </p:nvSpPr>
-        <p:spPr/>
-        <p:txBody>
-          <a:bodyPr/>
-          <a:lstStyle/>
-          <a:p>
-            <a:r>
-              <a:rPr lang="en-US" dirty="0"/>
-              <a:t>What Does It Actually Do?</a:t>
-            </a:r>
-            <a:endParaRPr lang="en-IN" dirty="0"/>
-          </a:p>
-        </p:txBody>
-      </p:sp>
-      <p:sp>
-        <p:nvSpPr>
-          <p:cNvPr id="3" name="Content Placeholder 2">
-            <a:extLst>
-              <a:ext uri="{FF2B5EF4-FFF2-40B4-BE49-F238E27FC236}">
-                <a16:creationId xmlns:a16="http://schemas.microsoft.com/office/drawing/2014/main" id="{79375347-7506-87F2-63AF-23A29D5A3801}"/>
-              </a:ext>
-            </a:extLst>
-          </p:cNvPr>
-          <p:cNvSpPr>
-            <a:spLocks noGrp="1"/>
-          </p:cNvSpPr>
-          <p:nvPr>
-            <p:ph idx="1"/>
-          </p:nvPr>
-        </p:nvSpPr>
-        <p:spPr>
-          <a:xfrm>
-            <a:off x="768096" y="2285999"/>
-            <a:ext cx="7290055" cy="4504267"/>
-          </a:xfrm>
-        </p:spPr>
-        <p:txBody>
-          <a:bodyPr>
-            <a:normAutofit fontScale="62500" lnSpcReduction="20000"/>
-          </a:bodyPr>
-          <a:lstStyle/>
-          <a:p>
-            <a:r>
-              <a:rPr lang="en-IN" b="1" dirty="0"/>
-              <a:t>1. Syntax &amp; Logic Validation</a:t>
-            </a:r>
-          </a:p>
-          <a:p>
-            <a:r>
-              <a:rPr lang="en-IN" dirty="0"/>
-              <a:t>Detects missing joins </a:t>
-            </a:r>
-          </a:p>
-          <a:p>
-            <a:r>
-              <a:rPr lang="en-IN" dirty="0"/>
-              <a:t>Identifies wrong aggregations </a:t>
-            </a:r>
-          </a:p>
-          <a:p>
-            <a:r>
-              <a:rPr lang="en-IN" dirty="0"/>
-              <a:t>Flags incorrect filters </a:t>
-            </a:r>
-          </a:p>
-          <a:p>
-            <a:r>
-              <a:rPr lang="en-IN" b="1" dirty="0"/>
-              <a:t>2. Performance Optimization</a:t>
-            </a:r>
-          </a:p>
-          <a:p>
-            <a:r>
-              <a:rPr lang="en-IN" b="1" dirty="0"/>
-              <a:t>Example (Bad Query):</a:t>
-            </a:r>
-            <a:endParaRPr lang="en-IN" dirty="0"/>
-          </a:p>
-          <a:p>
-            <a:r>
-              <a:rPr lang="en-IN" dirty="0"/>
-              <a:t>SELECT *</a:t>
-            </a:r>
-            <a:br>
-              <a:rPr lang="en-IN" dirty="0"/>
-            </a:br>
-            <a:r>
-              <a:rPr lang="en-IN" dirty="0"/>
-              <a:t>FROM orders o</a:t>
-            </a:r>
-            <a:br>
-              <a:rPr lang="en-IN" dirty="0"/>
-            </a:br>
-            <a:r>
-              <a:rPr lang="en-IN" dirty="0"/>
-              <a:t>JOIN customers c ON </a:t>
-            </a:r>
-            <a:r>
-              <a:rPr lang="en-IN" dirty="0" err="1"/>
-              <a:t>o.customer_id</a:t>
-            </a:r>
-            <a:r>
-              <a:rPr lang="en-IN" dirty="0"/>
-              <a:t> = </a:t>
-            </a:r>
-            <a:r>
-              <a:rPr lang="en-IN" dirty="0" err="1"/>
-              <a:t>c.customer_id</a:t>
-            </a:r>
-            <a:endParaRPr lang="en-IN" dirty="0"/>
-          </a:p>
-          <a:p>
-            <a:r>
-              <a:rPr lang="en-IN" b="1" dirty="0"/>
-              <a:t>Issues:</a:t>
-            </a:r>
-            <a:endParaRPr lang="en-IN" dirty="0"/>
-          </a:p>
-          <a:p>
-            <a:r>
-              <a:rPr lang="en-IN" dirty="0"/>
-              <a:t>SELECT * (unnecessary columns) </a:t>
-            </a:r>
-          </a:p>
-          <a:p>
-            <a:r>
-              <a:rPr lang="en-IN" dirty="0"/>
-              <a:t>No filtering → full table scan </a:t>
-            </a:r>
-          </a:p>
-          <a:p>
-            <a:r>
-              <a:rPr lang="en-IN" b="1" dirty="0"/>
-              <a:t>Optimized Version:</a:t>
-            </a:r>
-            <a:endParaRPr lang="en-IN" dirty="0"/>
-          </a:p>
-          <a:p>
-            <a:r>
-              <a:rPr lang="en-IN" dirty="0"/>
-              <a:t>SELECT </a:t>
-            </a:r>
-            <a:r>
-              <a:rPr lang="en-IN" dirty="0" err="1"/>
-              <a:t>o.order_id</a:t>
-            </a:r>
-            <a:r>
-              <a:rPr lang="en-IN" dirty="0"/>
-              <a:t>, </a:t>
-            </a:r>
-            <a:r>
-              <a:rPr lang="en-IN" dirty="0" err="1"/>
-              <a:t>c.customer_name</a:t>
-            </a:r>
-            <a:r>
-              <a:rPr lang="en-IN" dirty="0"/>
-              <a:t>, </a:t>
-            </a:r>
-            <a:r>
-              <a:rPr lang="en-IN" dirty="0" err="1"/>
-              <a:t>o.amount</a:t>
-            </a:r>
-            <a:br>
-              <a:rPr lang="en-IN" dirty="0"/>
-            </a:br>
-            <a:r>
-              <a:rPr lang="en-IN" dirty="0"/>
-              <a:t>FROM orders o</a:t>
-            </a:r>
-            <a:br>
-              <a:rPr lang="en-IN" dirty="0"/>
-            </a:br>
-            <a:r>
-              <a:rPr lang="en-IN" dirty="0"/>
-              <a:t>JOIN customers c ON </a:t>
-            </a:r>
-            <a:r>
-              <a:rPr lang="en-IN" dirty="0" err="1"/>
-              <a:t>o.customer_id</a:t>
-            </a:r>
-            <a:r>
-              <a:rPr lang="en-IN" dirty="0"/>
-              <a:t> = </a:t>
-            </a:r>
-            <a:r>
-              <a:rPr lang="en-IN" dirty="0" err="1"/>
-              <a:t>c.customer_id</a:t>
-            </a:r>
-            <a:br>
-              <a:rPr lang="en-IN" dirty="0"/>
-            </a:br>
-            <a:r>
-              <a:rPr lang="en-IN" dirty="0"/>
-              <a:t>WHERE </a:t>
-            </a:r>
-            <a:r>
-              <a:rPr lang="en-IN" dirty="0" err="1"/>
-              <a:t>o.order_date</a:t>
-            </a:r>
-            <a:r>
-              <a:rPr lang="en-IN" dirty="0"/>
-              <a:t> &gt;= CURRENT_DATE - INTERVAL '30 days'</a:t>
-            </a:r>
-          </a:p>
-          <a:p>
-            <a:endParaRPr lang="en-IN" dirty="0"/>
-          </a:p>
-        </p:txBody>
-      </p:sp>
-    </p:spTree>
-    <p:extLst>
-      <p:ext uri="{BB962C8B-B14F-4D97-AF65-F5344CB8AC3E}">
-        <p14:creationId xmlns:p14="http://schemas.microsoft.com/office/powerpoint/2010/main" val="2612402814"/>
       </p:ext>
     </p:extLst>
   </p:cSld>
@@ -21642,6 +21457,417 @@
       </p:grpSpPr>
       <p:sp>
         <p:nvSpPr>
+          <p:cNvPr id="2" name="Title 1"/>
+          <p:cNvSpPr>
+            <a:spLocks noGrp="1"/>
+          </p:cNvSpPr>
+          <p:nvPr>
+            <p:ph type="title"/>
+          </p:nvPr>
+        </p:nvSpPr>
+        <p:spPr/>
+        <p:txBody>
+          <a:bodyPr/>
+          <a:lstStyle/>
+          <a:p>
+            <a:r>
+              <a:rPr dirty="0"/>
+              <a:t>SQL Code Review Agent</a:t>
+            </a:r>
+          </a:p>
+        </p:txBody>
+      </p:sp>
+      <p:sp>
+        <p:nvSpPr>
+          <p:cNvPr id="3" name="Content Placeholder 2"/>
+          <p:cNvSpPr>
+            <a:spLocks noGrp="1"/>
+          </p:cNvSpPr>
+          <p:nvPr>
+            <p:ph idx="1"/>
+          </p:nvPr>
+        </p:nvSpPr>
+        <p:spPr/>
+        <p:txBody>
+          <a:bodyPr>
+            <a:normAutofit fontScale="92500" lnSpcReduction="20000"/>
+          </a:bodyPr>
+          <a:lstStyle/>
+          <a:p>
+            <a:r>
+              <a:rPr lang="en-US" dirty="0"/>
+              <a:t>A </a:t>
+            </a:r>
+            <a:r>
+              <a:rPr lang="en-US" b="1" dirty="0"/>
+              <a:t>SQL Code Review Agent</a:t>
+            </a:r>
+            <a:r>
+              <a:rPr lang="en-US" dirty="0"/>
+              <a:t> is an AI-powered assistant that automatically reviews SQL queries to ensure they are:</a:t>
+            </a:r>
+          </a:p>
+          <a:p>
+            <a:r>
+              <a:rPr lang="en-US" b="1" dirty="0"/>
+              <a:t>Correct</a:t>
+            </a:r>
+            <a:r>
+              <a:rPr lang="en-US" dirty="0"/>
+              <a:t> </a:t>
+            </a:r>
+          </a:p>
+          <a:p>
+            <a:r>
+              <a:rPr lang="en-US" b="1" dirty="0"/>
+              <a:t>Efficient</a:t>
+            </a:r>
+            <a:r>
+              <a:rPr lang="en-US" dirty="0"/>
+              <a:t> </a:t>
+            </a:r>
+          </a:p>
+          <a:p>
+            <a:r>
+              <a:rPr lang="en-US" b="1" dirty="0"/>
+              <a:t>Secure</a:t>
+            </a:r>
+            <a:r>
+              <a:rPr lang="en-US" dirty="0"/>
+              <a:t> </a:t>
+            </a:r>
+          </a:p>
+          <a:p>
+            <a:r>
+              <a:rPr lang="en-US" b="1" dirty="0"/>
+              <a:t>Readable</a:t>
+            </a:r>
+            <a:r>
+              <a:rPr lang="en-US" dirty="0"/>
+              <a:t> </a:t>
+            </a:r>
+          </a:p>
+          <a:p>
+            <a:r>
+              <a:rPr lang="en-US" dirty="0"/>
+              <a:t>It acts like a </a:t>
+            </a:r>
+            <a:r>
+              <a:rPr lang="en-US" b="1" dirty="0"/>
+              <a:t>senior data engineer reviewing your SQL</a:t>
+            </a:r>
+            <a:r>
+              <a:rPr lang="en-US" dirty="0"/>
+              <a:t>, but instantly.</a:t>
+            </a:r>
+          </a:p>
+          <a:p>
+            <a:pPr marL="0" indent="0">
+              <a:buNone/>
+            </a:pPr>
+            <a:endParaRPr lang="en-IN" dirty="0"/>
+          </a:p>
+          <a:p>
+            <a:r>
+              <a:rPr dirty="0"/>
+              <a:t>Security checks</a:t>
+            </a:r>
+          </a:p>
+          <a:p>
+            <a:r>
+              <a:rPr dirty="0"/>
+              <a:t>Performance tuning</a:t>
+            </a:r>
+          </a:p>
+          <a:p>
+            <a:r>
+              <a:rPr dirty="0"/>
+              <a:t>Code readability</a:t>
+            </a:r>
+          </a:p>
+        </p:txBody>
+      </p:sp>
+    </p:spTree>
+  </p:cSld>
+  <p:clrMapOvr>
+    <a:masterClrMapping/>
+  </p:clrMapOvr>
+</p:sld>
+</file>
+
+<file path=ppt/slides/slide41.xml><?xml version="1.0" encoding="utf-8"?>
+<p:sld xmlns:a="http://schemas.openxmlformats.org/drawingml/2006/main" xmlns:r="http://schemas.openxmlformats.org/officeDocument/2006/relationships" xmlns:p="http://schemas.openxmlformats.org/presentationml/2006/main">
+  <p:cSld>
+    <p:spTree>
+      <p:nvGrpSpPr>
+        <p:cNvPr id="1" name=""/>
+        <p:cNvGrpSpPr/>
+        <p:nvPr/>
+      </p:nvGrpSpPr>
+      <p:grpSpPr>
+        <a:xfrm>
+          <a:off x="0" y="0"/>
+          <a:ext cx="0" cy="0"/>
+          <a:chOff x="0" y="0"/>
+          <a:chExt cx="0" cy="0"/>
+        </a:xfrm>
+      </p:grpSpPr>
+      <p:sp>
+        <p:nvSpPr>
+          <p:cNvPr id="2" name="Title 1">
+            <a:extLst>
+              <a:ext uri="{FF2B5EF4-FFF2-40B4-BE49-F238E27FC236}">
+                <a16:creationId xmlns:a16="http://schemas.microsoft.com/office/drawing/2014/main" id="{1E76E9CE-19B4-4378-7B5C-1506335AA9F7}"/>
+              </a:ext>
+            </a:extLst>
+          </p:cNvPr>
+          <p:cNvSpPr>
+            <a:spLocks noGrp="1"/>
+          </p:cNvSpPr>
+          <p:nvPr>
+            <p:ph type="title"/>
+          </p:nvPr>
+        </p:nvSpPr>
+        <p:spPr/>
+        <p:txBody>
+          <a:bodyPr/>
+          <a:lstStyle/>
+          <a:p>
+            <a:r>
+              <a:rPr lang="en-US" dirty="0"/>
+              <a:t>What Does It Actually Do?</a:t>
+            </a:r>
+            <a:endParaRPr lang="en-IN" dirty="0"/>
+          </a:p>
+        </p:txBody>
+      </p:sp>
+      <p:sp>
+        <p:nvSpPr>
+          <p:cNvPr id="3" name="Content Placeholder 2">
+            <a:extLst>
+              <a:ext uri="{FF2B5EF4-FFF2-40B4-BE49-F238E27FC236}">
+                <a16:creationId xmlns:a16="http://schemas.microsoft.com/office/drawing/2014/main" id="{79375347-7506-87F2-63AF-23A29D5A3801}"/>
+              </a:ext>
+            </a:extLst>
+          </p:cNvPr>
+          <p:cNvSpPr>
+            <a:spLocks noGrp="1"/>
+          </p:cNvSpPr>
+          <p:nvPr>
+            <p:ph idx="1"/>
+          </p:nvPr>
+        </p:nvSpPr>
+        <p:spPr>
+          <a:xfrm>
+            <a:off x="768096" y="2285999"/>
+            <a:ext cx="7290055" cy="4504267"/>
+          </a:xfrm>
+        </p:spPr>
+        <p:txBody>
+          <a:bodyPr>
+            <a:normAutofit fontScale="62500" lnSpcReduction="20000"/>
+          </a:bodyPr>
+          <a:lstStyle/>
+          <a:p>
+            <a:r>
+              <a:rPr lang="en-IN" b="1" dirty="0"/>
+              <a:t>1. Syntax &amp; Logic Validation</a:t>
+            </a:r>
+          </a:p>
+          <a:p>
+            <a:r>
+              <a:rPr lang="en-IN" dirty="0"/>
+              <a:t>Detects missing joins </a:t>
+            </a:r>
+          </a:p>
+          <a:p>
+            <a:r>
+              <a:rPr lang="en-IN" dirty="0"/>
+              <a:t>Identifies wrong aggregations </a:t>
+            </a:r>
+          </a:p>
+          <a:p>
+            <a:r>
+              <a:rPr lang="en-IN" dirty="0"/>
+              <a:t>Flags incorrect filters </a:t>
+            </a:r>
+          </a:p>
+          <a:p>
+            <a:r>
+              <a:rPr lang="en-IN" b="1" dirty="0"/>
+              <a:t>2. Performance Optimization</a:t>
+            </a:r>
+          </a:p>
+          <a:p>
+            <a:r>
+              <a:rPr lang="en-IN" b="1" dirty="0"/>
+              <a:t>Example (Bad Query):</a:t>
+            </a:r>
+            <a:endParaRPr lang="en-IN" dirty="0"/>
+          </a:p>
+          <a:p>
+            <a:r>
+              <a:rPr lang="en-IN" dirty="0"/>
+              <a:t>SELECT *</a:t>
+            </a:r>
+            <a:br>
+              <a:rPr lang="en-IN" dirty="0"/>
+            </a:br>
+            <a:r>
+              <a:rPr lang="en-IN" dirty="0"/>
+              <a:t>FROM orders o</a:t>
+            </a:r>
+            <a:br>
+              <a:rPr lang="en-IN" dirty="0"/>
+            </a:br>
+            <a:r>
+              <a:rPr lang="en-IN" dirty="0"/>
+              <a:t>JOIN customers c ON </a:t>
+            </a:r>
+            <a:r>
+              <a:rPr lang="en-IN" dirty="0" err="1"/>
+              <a:t>o.customer_id</a:t>
+            </a:r>
+            <a:r>
+              <a:rPr lang="en-IN" dirty="0"/>
+              <a:t> = </a:t>
+            </a:r>
+            <a:r>
+              <a:rPr lang="en-IN" dirty="0" err="1"/>
+              <a:t>c.customer_id</a:t>
+            </a:r>
+            <a:endParaRPr lang="en-IN" dirty="0"/>
+          </a:p>
+          <a:p>
+            <a:r>
+              <a:rPr lang="en-IN" b="1" dirty="0"/>
+              <a:t>Issues:</a:t>
+            </a:r>
+            <a:endParaRPr lang="en-IN" dirty="0"/>
+          </a:p>
+          <a:p>
+            <a:r>
+              <a:rPr lang="en-IN" dirty="0"/>
+              <a:t>SELECT * (unnecessary columns) </a:t>
+            </a:r>
+          </a:p>
+          <a:p>
+            <a:r>
+              <a:rPr lang="en-IN" dirty="0"/>
+              <a:t>No filtering → full table scan </a:t>
+            </a:r>
+          </a:p>
+          <a:p>
+            <a:r>
+              <a:rPr lang="en-IN" b="1" dirty="0"/>
+              <a:t>Optimized Version:</a:t>
+            </a:r>
+            <a:endParaRPr lang="en-IN" dirty="0"/>
+          </a:p>
+          <a:p>
+            <a:r>
+              <a:rPr lang="en-IN" dirty="0"/>
+              <a:t>SELECT </a:t>
+            </a:r>
+            <a:r>
+              <a:rPr lang="en-IN" dirty="0" err="1"/>
+              <a:t>o.order_id</a:t>
+            </a:r>
+            <a:r>
+              <a:rPr lang="en-IN" dirty="0"/>
+              <a:t>, </a:t>
+            </a:r>
+            <a:r>
+              <a:rPr lang="en-IN" dirty="0" err="1"/>
+              <a:t>c.customer_name</a:t>
+            </a:r>
+            <a:r>
+              <a:rPr lang="en-IN" dirty="0"/>
+              <a:t>, </a:t>
+            </a:r>
+            <a:r>
+              <a:rPr lang="en-IN" dirty="0" err="1"/>
+              <a:t>o.amount</a:t>
+            </a:r>
+            <a:br>
+              <a:rPr lang="en-IN" dirty="0"/>
+            </a:br>
+            <a:r>
+              <a:rPr lang="en-IN" dirty="0"/>
+              <a:t>FROM orders o</a:t>
+            </a:r>
+            <a:br>
+              <a:rPr lang="en-IN" dirty="0"/>
+            </a:br>
+            <a:r>
+              <a:rPr lang="en-IN" dirty="0"/>
+              <a:t>JOIN customers c ON </a:t>
+            </a:r>
+            <a:r>
+              <a:rPr lang="en-IN" dirty="0" err="1"/>
+              <a:t>o.customer_id</a:t>
+            </a:r>
+            <a:r>
+              <a:rPr lang="en-IN" dirty="0"/>
+              <a:t> = </a:t>
+            </a:r>
+            <a:r>
+              <a:rPr lang="en-IN" dirty="0" err="1"/>
+              <a:t>c.customer_id</a:t>
+            </a:r>
+            <a:br>
+              <a:rPr lang="en-IN" dirty="0"/>
+            </a:br>
+            <a:r>
+              <a:rPr lang="en-IN" dirty="0"/>
+              <a:t>WHERE </a:t>
+            </a:r>
+            <a:r>
+              <a:rPr lang="en-IN" dirty="0" err="1"/>
+              <a:t>o.order_date</a:t>
+            </a:r>
+            <a:r>
+              <a:rPr lang="en-IN" dirty="0"/>
+              <a:t> &gt;= CURRENT_DATE - INTERVAL '30 days'</a:t>
+            </a:r>
+          </a:p>
+          <a:p>
+            <a:endParaRPr lang="en-IN" dirty="0"/>
+          </a:p>
+        </p:txBody>
+      </p:sp>
+    </p:spTree>
+    <p:extLst>
+      <p:ext uri="{BB962C8B-B14F-4D97-AF65-F5344CB8AC3E}">
+        <p14:creationId xmlns:p14="http://schemas.microsoft.com/office/powerpoint/2010/main" val="2612402814"/>
+      </p:ext>
+    </p:extLst>
+  </p:cSld>
+  <p:clrMapOvr>
+    <a:masterClrMapping/>
+  </p:clrMapOvr>
+</p:sld>
+</file>
+
+<file path=ppt/slides/slide42.xml><?xml version="1.0" encoding="utf-8"?>
+<p:sld xmlns:a="http://schemas.openxmlformats.org/drawingml/2006/main" xmlns:r="http://schemas.openxmlformats.org/officeDocument/2006/relationships" xmlns:p="http://schemas.openxmlformats.org/presentationml/2006/main">
+  <p:cSld>
+    <p:spTree>
+      <p:nvGrpSpPr>
+        <p:cNvPr id="1" name=""/>
+        <p:cNvGrpSpPr/>
+        <p:nvPr/>
+      </p:nvGrpSpPr>
+      <p:grpSpPr>
+        <a:xfrm>
+          <a:off x="0" y="0"/>
+          <a:ext cx="0" cy="0"/>
+          <a:chOff x="0" y="0"/>
+          <a:chExt cx="0" cy="0"/>
+        </a:xfrm>
+      </p:grpSpPr>
+      <p:sp>
+        <p:nvSpPr>
           <p:cNvPr id="3" name="Content Placeholder 2">
             <a:extLst>
               <a:ext uri="{FF2B5EF4-FFF2-40B4-BE49-F238E27FC236}">
@@ -21857,7 +22083,7 @@
 </p:sld>
 </file>
 
-<file path=ppt/slides/slide41.xml><?xml version="1.0" encoding="utf-8"?>
+<file path=ppt/slides/slide43.xml><?xml version="1.0" encoding="utf-8"?>
 <p:sld xmlns:a="http://schemas.openxmlformats.org/drawingml/2006/main" xmlns:r="http://schemas.openxmlformats.org/officeDocument/2006/relationships" xmlns:p="http://schemas.openxmlformats.org/presentationml/2006/main">
   <p:cSld>
     <p:spTree>
@@ -21983,175 +22209,6 @@
         <p14:creationId xmlns:p14="http://schemas.microsoft.com/office/powerpoint/2010/main" val="3707009077"/>
       </p:ext>
     </p:extLst>
-  </p:cSld>
-  <p:clrMapOvr>
-    <a:masterClrMapping/>
-  </p:clrMapOvr>
-</p:sld>
-</file>
-
-<file path=ppt/slides/slide42.xml><?xml version="1.0" encoding="utf-8"?>
-<p:sld xmlns:a="http://schemas.openxmlformats.org/drawingml/2006/main" xmlns:r="http://schemas.openxmlformats.org/officeDocument/2006/relationships" xmlns:p="http://schemas.openxmlformats.org/presentationml/2006/main">
-  <p:cSld>
-    <p:spTree>
-      <p:nvGrpSpPr>
-        <p:cNvPr id="1" name=""/>
-        <p:cNvGrpSpPr/>
-        <p:nvPr/>
-      </p:nvGrpSpPr>
-      <p:grpSpPr>
-        <a:xfrm>
-          <a:off x="0" y="0"/>
-          <a:ext cx="0" cy="0"/>
-          <a:chOff x="0" y="0"/>
-          <a:chExt cx="0" cy="0"/>
-        </a:xfrm>
-      </p:grpSpPr>
-      <p:sp>
-        <p:nvSpPr>
-          <p:cNvPr id="2" name="Title 1"/>
-          <p:cNvSpPr>
-            <a:spLocks noGrp="1"/>
-          </p:cNvSpPr>
-          <p:nvPr>
-            <p:ph type="title"/>
-          </p:nvPr>
-        </p:nvSpPr>
-        <p:spPr/>
-        <p:txBody>
-          <a:bodyPr/>
-          <a:lstStyle/>
-          <a:p>
-            <a:r>
-              <a:t>Tools Ecosystem</a:t>
-            </a:r>
-          </a:p>
-        </p:txBody>
-      </p:sp>
-      <p:sp>
-        <p:nvSpPr>
-          <p:cNvPr id="3" name="Content Placeholder 2"/>
-          <p:cNvSpPr>
-            <a:spLocks noGrp="1"/>
-          </p:cNvSpPr>
-          <p:nvPr>
-            <p:ph idx="1"/>
-          </p:nvPr>
-        </p:nvSpPr>
-        <p:spPr/>
-        <p:txBody>
-          <a:bodyPr/>
-          <a:lstStyle/>
-          <a:p>
-            <a:r>
-              <a:t>Claude Code</a:t>
-            </a:r>
-          </a:p>
-          <a:p>
-            <a:r>
-              <a:t>GitHub Copilot</a:t>
-            </a:r>
-          </a:p>
-          <a:p>
-            <a:r>
-              <a:t>dbt Cloud</a:t>
-            </a:r>
-          </a:p>
-          <a:p>
-            <a:r>
-              <a:t>SQLFluff</a:t>
-            </a:r>
-          </a:p>
-          <a:p>
-            <a:r>
-              <a:t>ChatDB</a:t>
-            </a:r>
-          </a:p>
-        </p:txBody>
-      </p:sp>
-    </p:spTree>
-  </p:cSld>
-  <p:clrMapOvr>
-    <a:masterClrMapping/>
-  </p:clrMapOvr>
-</p:sld>
-</file>
-
-<file path=ppt/slides/slide43.xml><?xml version="1.0" encoding="utf-8"?>
-<p:sld xmlns:a="http://schemas.openxmlformats.org/drawingml/2006/main" xmlns:r="http://schemas.openxmlformats.org/officeDocument/2006/relationships" xmlns:p="http://schemas.openxmlformats.org/presentationml/2006/main">
-  <p:cSld>
-    <p:spTree>
-      <p:nvGrpSpPr>
-        <p:cNvPr id="1" name=""/>
-        <p:cNvGrpSpPr/>
-        <p:nvPr/>
-      </p:nvGrpSpPr>
-      <p:grpSpPr>
-        <a:xfrm>
-          <a:off x="0" y="0"/>
-          <a:ext cx="0" cy="0"/>
-          <a:chOff x="0" y="0"/>
-          <a:chExt cx="0" cy="0"/>
-        </a:xfrm>
-      </p:grpSpPr>
-      <p:sp>
-        <p:nvSpPr>
-          <p:cNvPr id="2" name="Title 1"/>
-          <p:cNvSpPr>
-            <a:spLocks noGrp="1"/>
-          </p:cNvSpPr>
-          <p:nvPr>
-            <p:ph type="title"/>
-          </p:nvPr>
-        </p:nvSpPr>
-        <p:spPr/>
-        <p:txBody>
-          <a:bodyPr/>
-          <a:lstStyle/>
-          <a:p>
-            <a:r>
-              <a:t>dbt Project Structure</a:t>
-            </a:r>
-          </a:p>
-        </p:txBody>
-      </p:sp>
-      <p:sp>
-        <p:nvSpPr>
-          <p:cNvPr id="3" name="Content Placeholder 2"/>
-          <p:cNvSpPr>
-            <a:spLocks noGrp="1"/>
-          </p:cNvSpPr>
-          <p:nvPr>
-            <p:ph idx="1"/>
-          </p:nvPr>
-        </p:nvSpPr>
-        <p:spPr/>
-        <p:txBody>
-          <a:bodyPr/>
-          <a:lstStyle/>
-          <a:p>
-            <a:r>
-              <a:t>models/</a:t>
-            </a:r>
-          </a:p>
-          <a:p>
-            <a:r>
-              <a:t>sources.yml</a:t>
-            </a:r>
-          </a:p>
-          <a:p>
-            <a:r>
-              <a:t>schema.yml</a:t>
-            </a:r>
-          </a:p>
-          <a:p>
-            <a:r>
-              <a:t>tests/</a:t>
-            </a:r>
-          </a:p>
-        </p:txBody>
-      </p:sp>
-    </p:spTree>
   </p:cSld>
   <p:clrMapOvr>
     <a:masterClrMapping/>
@@ -22192,7 +22249,7 @@
           <a:lstStyle/>
           <a:p>
             <a:r>
-              <a:t>Optimization Report</a:t>
+              <a:t>Tools Ecosystem</a:t>
             </a:r>
           </a:p>
         </p:txBody>
@@ -22213,17 +22270,27 @@
           <a:lstStyle/>
           <a:p>
             <a:r>
-              <a:t>Before vs After query</a:t>
-            </a:r>
-          </a:p>
-          <a:p>
-            <a:r>
-              <a:t>Execution time</a:t>
-            </a:r>
-          </a:p>
-          <a:p>
-            <a:r>
-              <a:t>Cost improvement</a:t>
+              <a:t>Claude Code</a:t>
+            </a:r>
+          </a:p>
+          <a:p>
+            <a:r>
+              <a:t>GitHub Copilot</a:t>
+            </a:r>
+          </a:p>
+          <a:p>
+            <a:r>
+              <a:t>dbt Cloud</a:t>
+            </a:r>
+          </a:p>
+          <a:p>
+            <a:r>
+              <a:t>SQLFluff</a:t>
+            </a:r>
+          </a:p>
+          <a:p>
+            <a:r>
+              <a:t>ChatDB</a:t>
             </a:r>
           </a:p>
         </p:txBody>
@@ -22269,7 +22336,7 @@
           <a:lstStyle/>
           <a:p>
             <a:r>
-              <a:t>Best Practices</a:t>
+              <a:t>dbt Project Structure</a:t>
             </a:r>
           </a:p>
         </p:txBody>
@@ -22290,17 +22357,22 @@
           <a:lstStyle/>
           <a:p>
             <a:r>
-              <a:t>Always validate AI output</a:t>
-            </a:r>
-          </a:p>
-          <a:p>
-            <a:r>
-              <a:t>Use version control</a:t>
-            </a:r>
-          </a:p>
-          <a:p>
-            <a:r>
-              <a:t>Monitor performance</a:t>
+              <a:t>models/</a:t>
+            </a:r>
+          </a:p>
+          <a:p>
+            <a:r>
+              <a:t>sources.yml</a:t>
+            </a:r>
+          </a:p>
+          <a:p>
+            <a:r>
+              <a:t>schema.yml</a:t>
+            </a:r>
+          </a:p>
+          <a:p>
+            <a:r>
+              <a:t>tests/</a:t>
             </a:r>
           </a:p>
         </p:txBody>
@@ -22314,6 +22386,1052 @@
 </file>
 
 <file path=ppt/slides/slide46.xml><?xml version="1.0" encoding="utf-8"?>
+<p:sld xmlns:a="http://schemas.openxmlformats.org/drawingml/2006/main" xmlns:r="http://schemas.openxmlformats.org/officeDocument/2006/relationships" xmlns:p="http://schemas.openxmlformats.org/presentationml/2006/main">
+  <p:cSld>
+    <p:spTree>
+      <p:nvGrpSpPr>
+        <p:cNvPr id="1" name=""/>
+        <p:cNvGrpSpPr/>
+        <p:nvPr/>
+      </p:nvGrpSpPr>
+      <p:grpSpPr>
+        <a:xfrm>
+          <a:off x="0" y="0"/>
+          <a:ext cx="0" cy="0"/>
+          <a:chOff x="0" y="0"/>
+          <a:chExt cx="0" cy="0"/>
+        </a:xfrm>
+      </p:grpSpPr>
+      <p:sp>
+        <p:nvSpPr>
+          <p:cNvPr id="2" name="Title 1"/>
+          <p:cNvSpPr>
+            <a:spLocks noGrp="1"/>
+          </p:cNvSpPr>
+          <p:nvPr>
+            <p:ph type="title"/>
+          </p:nvPr>
+        </p:nvSpPr>
+        <p:spPr/>
+        <p:txBody>
+          <a:bodyPr/>
+          <a:lstStyle/>
+          <a:p>
+            <a:r>
+              <a:t>Optimization Report</a:t>
+            </a:r>
+          </a:p>
+        </p:txBody>
+      </p:sp>
+      <p:sp>
+        <p:nvSpPr>
+          <p:cNvPr id="3" name="Content Placeholder 2"/>
+          <p:cNvSpPr>
+            <a:spLocks noGrp="1"/>
+          </p:cNvSpPr>
+          <p:nvPr>
+            <p:ph idx="1"/>
+          </p:nvPr>
+        </p:nvSpPr>
+        <p:spPr/>
+        <p:txBody>
+          <a:bodyPr/>
+          <a:lstStyle/>
+          <a:p>
+            <a:r>
+              <a:t>Before vs After query</a:t>
+            </a:r>
+          </a:p>
+          <a:p>
+            <a:r>
+              <a:t>Execution time</a:t>
+            </a:r>
+          </a:p>
+          <a:p>
+            <a:r>
+              <a:t>Cost improvement</a:t>
+            </a:r>
+          </a:p>
+        </p:txBody>
+      </p:sp>
+    </p:spTree>
+  </p:cSld>
+  <p:clrMapOvr>
+    <a:masterClrMapping/>
+  </p:clrMapOvr>
+</p:sld>
+</file>
+
+<file path=ppt/slides/slide47.xml><?xml version="1.0" encoding="utf-8"?>
+<p:sld xmlns:a="http://schemas.openxmlformats.org/drawingml/2006/main" xmlns:r="http://schemas.openxmlformats.org/officeDocument/2006/relationships" xmlns:p="http://schemas.openxmlformats.org/presentationml/2006/main">
+  <p:cSld>
+    <p:spTree>
+      <p:nvGrpSpPr>
+        <p:cNvPr id="1" name=""/>
+        <p:cNvGrpSpPr/>
+        <p:nvPr/>
+      </p:nvGrpSpPr>
+      <p:grpSpPr>
+        <a:xfrm>
+          <a:off x="0" y="0"/>
+          <a:ext cx="0" cy="0"/>
+          <a:chOff x="0" y="0"/>
+          <a:chExt cx="0" cy="0"/>
+        </a:xfrm>
+      </p:grpSpPr>
+      <p:sp>
+        <p:nvSpPr>
+          <p:cNvPr id="2" name="Title 1"/>
+          <p:cNvSpPr>
+            <a:spLocks noGrp="1"/>
+          </p:cNvSpPr>
+          <p:nvPr>
+            <p:ph type="title"/>
+          </p:nvPr>
+        </p:nvSpPr>
+        <p:spPr/>
+        <p:txBody>
+          <a:bodyPr/>
+          <a:lstStyle/>
+          <a:p>
+            <a:r>
+              <a:t>Best Practices</a:t>
+            </a:r>
+          </a:p>
+        </p:txBody>
+      </p:sp>
+      <p:sp>
+        <p:nvSpPr>
+          <p:cNvPr id="3" name="Content Placeholder 2"/>
+          <p:cNvSpPr>
+            <a:spLocks noGrp="1"/>
+          </p:cNvSpPr>
+          <p:nvPr>
+            <p:ph idx="1"/>
+          </p:nvPr>
+        </p:nvSpPr>
+        <p:spPr/>
+        <p:txBody>
+          <a:bodyPr/>
+          <a:lstStyle/>
+          <a:p>
+            <a:r>
+              <a:t>Always validate AI output</a:t>
+            </a:r>
+          </a:p>
+          <a:p>
+            <a:r>
+              <a:t>Use version control</a:t>
+            </a:r>
+          </a:p>
+          <a:p>
+            <a:r>
+              <a:t>Monitor performance</a:t>
+            </a:r>
+          </a:p>
+        </p:txBody>
+      </p:sp>
+    </p:spTree>
+  </p:cSld>
+  <p:clrMapOvr>
+    <a:masterClrMapping/>
+  </p:clrMapOvr>
+</p:sld>
+</file>
+
+<file path=ppt/slides/slide48.xml><?xml version="1.0" encoding="utf-8"?>
+<p:sld xmlns:a="http://schemas.openxmlformats.org/drawingml/2006/main" xmlns:r="http://schemas.openxmlformats.org/officeDocument/2006/relationships" xmlns:p="http://schemas.openxmlformats.org/presentationml/2006/main">
+  <p:cSld>
+    <p:spTree>
+      <p:nvGrpSpPr>
+        <p:cNvPr id="1" name=""/>
+        <p:cNvGrpSpPr/>
+        <p:nvPr/>
+      </p:nvGrpSpPr>
+      <p:grpSpPr>
+        <a:xfrm>
+          <a:off x="0" y="0"/>
+          <a:ext cx="0" cy="0"/>
+          <a:chOff x="0" y="0"/>
+          <a:chExt cx="0" cy="0"/>
+        </a:xfrm>
+      </p:grpSpPr>
+      <p:sp>
+        <p:nvSpPr>
+          <p:cNvPr id="2" name="Title 1">
+            <a:extLst>
+              <a:ext uri="{FF2B5EF4-FFF2-40B4-BE49-F238E27FC236}">
+                <a16:creationId xmlns:a16="http://schemas.microsoft.com/office/drawing/2014/main" id="{C2B80875-B7C0-000D-1B47-818965CAAE1F}"/>
+              </a:ext>
+            </a:extLst>
+          </p:cNvPr>
+          <p:cNvSpPr>
+            <a:spLocks noGrp="1"/>
+          </p:cNvSpPr>
+          <p:nvPr>
+            <p:ph type="title"/>
+          </p:nvPr>
+        </p:nvSpPr>
+        <p:spPr/>
+        <p:txBody>
+          <a:bodyPr>
+            <a:normAutofit fontScale="90000"/>
+          </a:bodyPr>
+          <a:lstStyle/>
+          <a:p>
+            <a:r>
+              <a:rPr lang="en-US" dirty="0"/>
+              <a:t>DBT vs </a:t>
+            </a:r>
+            <a:r>
+              <a:rPr lang="en-US" dirty="0" err="1"/>
+              <a:t>AirFLow</a:t>
+            </a:r>
+            <a:br>
+              <a:rPr lang="en-US" dirty="0"/>
+            </a:br>
+            <a:br>
+              <a:rPr lang="en-US" dirty="0"/>
+            </a:br>
+            <a:r>
+              <a:rPr lang="en-US" sz="2000" dirty="0" err="1"/>
+              <a:t>dbt</a:t>
+            </a:r>
+            <a:r>
+              <a:rPr lang="en-US" sz="2000" dirty="0"/>
+              <a:t> = Chef (cooks the data)</a:t>
+            </a:r>
+            <a:br>
+              <a:rPr lang="en-US" sz="2000" dirty="0"/>
+            </a:br>
+            <a:r>
+              <a:rPr lang="en-US" sz="2000" dirty="0"/>
+              <a:t>Airflow = Manager (decides when cooking happens)</a:t>
+            </a:r>
+            <a:endParaRPr lang="en-IN" sz="2000" dirty="0"/>
+          </a:p>
+        </p:txBody>
+      </p:sp>
+      <p:graphicFrame>
+        <p:nvGraphicFramePr>
+          <p:cNvPr id="4" name="Content Placeholder 3">
+            <a:extLst>
+              <a:ext uri="{FF2B5EF4-FFF2-40B4-BE49-F238E27FC236}">
+                <a16:creationId xmlns:a16="http://schemas.microsoft.com/office/drawing/2014/main" id="{0588BBD4-D645-82FD-8BD7-26239031F388}"/>
+              </a:ext>
+            </a:extLst>
+          </p:cNvPr>
+          <p:cNvGraphicFramePr>
+            <a:graphicFrameLocks noGrp="1"/>
+          </p:cNvGraphicFramePr>
+          <p:nvPr>
+            <p:ph idx="1"/>
+            <p:extLst>
+              <p:ext uri="{D42A27DB-BD31-4B8C-83A1-F6EECF244321}">
+                <p14:modId xmlns:p14="http://schemas.microsoft.com/office/powerpoint/2010/main" val="2218865377"/>
+              </p:ext>
+            </p:extLst>
+          </p:nvPr>
+        </p:nvGraphicFramePr>
+        <p:xfrm>
+          <a:off x="768350" y="2581275"/>
+          <a:ext cx="7289799" cy="3457580"/>
+        </p:xfrm>
+        <a:graphic>
+          <a:graphicData uri="http://schemas.openxmlformats.org/drawingml/2006/table">
+            <a:tbl>
+              <a:tblPr firstRow="1" firstCol="1" bandRow="1">
+                <a:tableStyleId>{5C22544A-7EE6-4342-B048-85BDC9FD1C3A}</a:tableStyleId>
+              </a:tblPr>
+              <a:tblGrid>
+                <a:gridCol w="2429933">
+                  <a:extLst>
+                    <a:ext uri="{9D8B030D-6E8A-4147-A177-3AD203B41FA5}">
+                      <a16:colId xmlns:a16="http://schemas.microsoft.com/office/drawing/2014/main" val="1324944143"/>
+                    </a:ext>
+                  </a:extLst>
+                </a:gridCol>
+                <a:gridCol w="2429933">
+                  <a:extLst>
+                    <a:ext uri="{9D8B030D-6E8A-4147-A177-3AD203B41FA5}">
+                      <a16:colId xmlns:a16="http://schemas.microsoft.com/office/drawing/2014/main" val="2888508160"/>
+                    </a:ext>
+                  </a:extLst>
+                </a:gridCol>
+                <a:gridCol w="2429933">
+                  <a:extLst>
+                    <a:ext uri="{9D8B030D-6E8A-4147-A177-3AD203B41FA5}">
+                      <a16:colId xmlns:a16="http://schemas.microsoft.com/office/drawing/2014/main" val="2082374475"/>
+                    </a:ext>
+                  </a:extLst>
+                </a:gridCol>
+              </a:tblGrid>
+              <a:tr h="493940">
+                <a:tc>
+                  <a:txBody>
+                    <a:bodyPr/>
+                    <a:lstStyle/>
+                    <a:p>
+                      <a:pPr>
+                        <a:lnSpc>
+                          <a:spcPct val="115000"/>
+                        </a:lnSpc>
+                        <a:spcAft>
+                          <a:spcPts val="1000"/>
+                        </a:spcAft>
+                        <a:buNone/>
+                      </a:pPr>
+                      <a:r>
+                        <a:rPr lang="en-IN" sz="1100">
+                          <a:effectLst/>
+                        </a:rPr>
+                        <a:t>Feature</a:t>
+                      </a:r>
+                      <a:endParaRPr lang="en-IN" sz="1100">
+                        <a:effectLst/>
+                        <a:latin typeface="Calibri" panose="020F0502020204030204" pitchFamily="34" charset="0"/>
+                        <a:ea typeface="Calibri" panose="020F0502020204030204" pitchFamily="34" charset="0"/>
+                        <a:cs typeface="Times New Roman" panose="02020603050405020304" pitchFamily="18" charset="0"/>
+                      </a:endParaRPr>
+                    </a:p>
+                  </a:txBody>
+                  <a:tcPr marL="9525" marR="9525" marT="9525" marB="9525" anchor="ctr"/>
+                </a:tc>
+                <a:tc>
+                  <a:txBody>
+                    <a:bodyPr/>
+                    <a:lstStyle/>
+                    <a:p>
+                      <a:pPr>
+                        <a:lnSpc>
+                          <a:spcPct val="115000"/>
+                        </a:lnSpc>
+                        <a:spcAft>
+                          <a:spcPts val="1000"/>
+                        </a:spcAft>
+                        <a:buNone/>
+                      </a:pPr>
+                      <a:r>
+                        <a:rPr lang="en-IN" sz="1100">
+                          <a:effectLst/>
+                        </a:rPr>
+                        <a:t>dbt</a:t>
+                      </a:r>
+                      <a:endParaRPr lang="en-IN" sz="1100">
+                        <a:effectLst/>
+                        <a:latin typeface="Calibri" panose="020F0502020204030204" pitchFamily="34" charset="0"/>
+                        <a:ea typeface="Calibri" panose="020F0502020204030204" pitchFamily="34" charset="0"/>
+                        <a:cs typeface="Times New Roman" panose="02020603050405020304" pitchFamily="18" charset="0"/>
+                      </a:endParaRPr>
+                    </a:p>
+                  </a:txBody>
+                  <a:tcPr marL="9525" marR="9525" marT="9525" marB="9525" anchor="ctr"/>
+                </a:tc>
+                <a:tc>
+                  <a:txBody>
+                    <a:bodyPr/>
+                    <a:lstStyle/>
+                    <a:p>
+                      <a:pPr>
+                        <a:lnSpc>
+                          <a:spcPct val="115000"/>
+                        </a:lnSpc>
+                        <a:spcAft>
+                          <a:spcPts val="1000"/>
+                        </a:spcAft>
+                        <a:buNone/>
+                      </a:pPr>
+                      <a:r>
+                        <a:rPr lang="en-IN" sz="1100">
+                          <a:effectLst/>
+                        </a:rPr>
+                        <a:t>Airflow</a:t>
+                      </a:r>
+                      <a:endParaRPr lang="en-IN" sz="1100">
+                        <a:effectLst/>
+                        <a:latin typeface="Calibri" panose="020F0502020204030204" pitchFamily="34" charset="0"/>
+                        <a:ea typeface="Calibri" panose="020F0502020204030204" pitchFamily="34" charset="0"/>
+                        <a:cs typeface="Times New Roman" panose="02020603050405020304" pitchFamily="18" charset="0"/>
+                      </a:endParaRPr>
+                    </a:p>
+                  </a:txBody>
+                  <a:tcPr marL="9525" marR="9525" marT="9525" marB="9525" anchor="ctr"/>
+                </a:tc>
+                <a:extLst>
+                  <a:ext uri="{0D108BD9-81ED-4DB2-BD59-A6C34878D82A}">
+                    <a16:rowId xmlns:a16="http://schemas.microsoft.com/office/drawing/2014/main" val="1829628477"/>
+                  </a:ext>
+                </a:extLst>
+              </a:tr>
+              <a:tr h="493940">
+                <a:tc>
+                  <a:txBody>
+                    <a:bodyPr/>
+                    <a:lstStyle/>
+                    <a:p>
+                      <a:pPr>
+                        <a:lnSpc>
+                          <a:spcPct val="115000"/>
+                        </a:lnSpc>
+                        <a:spcAft>
+                          <a:spcPts val="1000"/>
+                        </a:spcAft>
+                        <a:buNone/>
+                      </a:pPr>
+                      <a:r>
+                        <a:rPr lang="en-IN" sz="1100">
+                          <a:effectLst/>
+                        </a:rPr>
+                        <a:t>Purpose</a:t>
+                      </a:r>
+                      <a:endParaRPr lang="en-IN" sz="1100">
+                        <a:effectLst/>
+                        <a:latin typeface="Calibri" panose="020F0502020204030204" pitchFamily="34" charset="0"/>
+                        <a:ea typeface="Calibri" panose="020F0502020204030204" pitchFamily="34" charset="0"/>
+                        <a:cs typeface="Times New Roman" panose="02020603050405020304" pitchFamily="18" charset="0"/>
+                      </a:endParaRPr>
+                    </a:p>
+                  </a:txBody>
+                  <a:tcPr marL="9525" marR="9525" marT="9525" marB="9525" anchor="ctr"/>
+                </a:tc>
+                <a:tc>
+                  <a:txBody>
+                    <a:bodyPr/>
+                    <a:lstStyle/>
+                    <a:p>
+                      <a:pPr>
+                        <a:lnSpc>
+                          <a:spcPct val="115000"/>
+                        </a:lnSpc>
+                        <a:spcAft>
+                          <a:spcPts val="1000"/>
+                        </a:spcAft>
+                        <a:buNone/>
+                      </a:pPr>
+                      <a:r>
+                        <a:rPr lang="en-IN" sz="1100">
+                          <a:effectLst/>
+                        </a:rPr>
+                        <a:t>Data transformation</a:t>
+                      </a:r>
+                      <a:endParaRPr lang="en-IN" sz="1100">
+                        <a:effectLst/>
+                        <a:latin typeface="Calibri" panose="020F0502020204030204" pitchFamily="34" charset="0"/>
+                        <a:ea typeface="Calibri" panose="020F0502020204030204" pitchFamily="34" charset="0"/>
+                        <a:cs typeface="Times New Roman" panose="02020603050405020304" pitchFamily="18" charset="0"/>
+                      </a:endParaRPr>
+                    </a:p>
+                  </a:txBody>
+                  <a:tcPr marL="9525" marR="9525" marT="9525" marB="9525" anchor="ctr"/>
+                </a:tc>
+                <a:tc>
+                  <a:txBody>
+                    <a:bodyPr/>
+                    <a:lstStyle/>
+                    <a:p>
+                      <a:pPr>
+                        <a:lnSpc>
+                          <a:spcPct val="115000"/>
+                        </a:lnSpc>
+                        <a:spcAft>
+                          <a:spcPts val="1000"/>
+                        </a:spcAft>
+                        <a:buNone/>
+                      </a:pPr>
+                      <a:r>
+                        <a:rPr lang="en-IN" sz="1100">
+                          <a:effectLst/>
+                        </a:rPr>
+                        <a:t>Workflow orchestration</a:t>
+                      </a:r>
+                      <a:endParaRPr lang="en-IN" sz="1100">
+                        <a:effectLst/>
+                        <a:latin typeface="Calibri" panose="020F0502020204030204" pitchFamily="34" charset="0"/>
+                        <a:ea typeface="Calibri" panose="020F0502020204030204" pitchFamily="34" charset="0"/>
+                        <a:cs typeface="Times New Roman" panose="02020603050405020304" pitchFamily="18" charset="0"/>
+                      </a:endParaRPr>
+                    </a:p>
+                  </a:txBody>
+                  <a:tcPr marL="9525" marR="9525" marT="9525" marB="9525" anchor="ctr"/>
+                </a:tc>
+                <a:extLst>
+                  <a:ext uri="{0D108BD9-81ED-4DB2-BD59-A6C34878D82A}">
+                    <a16:rowId xmlns:a16="http://schemas.microsoft.com/office/drawing/2014/main" val="1619931762"/>
+                  </a:ext>
+                </a:extLst>
+              </a:tr>
+              <a:tr h="493940">
+                <a:tc>
+                  <a:txBody>
+                    <a:bodyPr/>
+                    <a:lstStyle/>
+                    <a:p>
+                      <a:pPr>
+                        <a:lnSpc>
+                          <a:spcPct val="115000"/>
+                        </a:lnSpc>
+                        <a:spcAft>
+                          <a:spcPts val="1000"/>
+                        </a:spcAft>
+                        <a:buNone/>
+                      </a:pPr>
+                      <a:r>
+                        <a:rPr lang="en-IN" sz="1100">
+                          <a:effectLst/>
+                        </a:rPr>
+                        <a:t>Language</a:t>
+                      </a:r>
+                      <a:endParaRPr lang="en-IN" sz="1100">
+                        <a:effectLst/>
+                        <a:latin typeface="Calibri" panose="020F0502020204030204" pitchFamily="34" charset="0"/>
+                        <a:ea typeface="Calibri" panose="020F0502020204030204" pitchFamily="34" charset="0"/>
+                        <a:cs typeface="Times New Roman" panose="02020603050405020304" pitchFamily="18" charset="0"/>
+                      </a:endParaRPr>
+                    </a:p>
+                  </a:txBody>
+                  <a:tcPr marL="9525" marR="9525" marT="9525" marB="9525" anchor="ctr"/>
+                </a:tc>
+                <a:tc>
+                  <a:txBody>
+                    <a:bodyPr/>
+                    <a:lstStyle/>
+                    <a:p>
+                      <a:pPr>
+                        <a:lnSpc>
+                          <a:spcPct val="115000"/>
+                        </a:lnSpc>
+                        <a:spcAft>
+                          <a:spcPts val="1000"/>
+                        </a:spcAft>
+                        <a:buNone/>
+                      </a:pPr>
+                      <a:r>
+                        <a:rPr lang="en-IN" sz="1100">
+                          <a:effectLst/>
+                        </a:rPr>
+                        <a:t>SQL</a:t>
+                      </a:r>
+                      <a:endParaRPr lang="en-IN" sz="1100">
+                        <a:effectLst/>
+                        <a:latin typeface="Calibri" panose="020F0502020204030204" pitchFamily="34" charset="0"/>
+                        <a:ea typeface="Calibri" panose="020F0502020204030204" pitchFamily="34" charset="0"/>
+                        <a:cs typeface="Times New Roman" panose="02020603050405020304" pitchFamily="18" charset="0"/>
+                      </a:endParaRPr>
+                    </a:p>
+                  </a:txBody>
+                  <a:tcPr marL="9525" marR="9525" marT="9525" marB="9525" anchor="ctr"/>
+                </a:tc>
+                <a:tc>
+                  <a:txBody>
+                    <a:bodyPr/>
+                    <a:lstStyle/>
+                    <a:p>
+                      <a:pPr>
+                        <a:lnSpc>
+                          <a:spcPct val="115000"/>
+                        </a:lnSpc>
+                        <a:spcAft>
+                          <a:spcPts val="1000"/>
+                        </a:spcAft>
+                        <a:buNone/>
+                      </a:pPr>
+                      <a:r>
+                        <a:rPr lang="en-IN" sz="1100">
+                          <a:effectLst/>
+                        </a:rPr>
+                        <a:t>Python</a:t>
+                      </a:r>
+                      <a:endParaRPr lang="en-IN" sz="1100">
+                        <a:effectLst/>
+                        <a:latin typeface="Calibri" panose="020F0502020204030204" pitchFamily="34" charset="0"/>
+                        <a:ea typeface="Calibri" panose="020F0502020204030204" pitchFamily="34" charset="0"/>
+                        <a:cs typeface="Times New Roman" panose="02020603050405020304" pitchFamily="18" charset="0"/>
+                      </a:endParaRPr>
+                    </a:p>
+                  </a:txBody>
+                  <a:tcPr marL="9525" marR="9525" marT="9525" marB="9525" anchor="ctr"/>
+                </a:tc>
+                <a:extLst>
+                  <a:ext uri="{0D108BD9-81ED-4DB2-BD59-A6C34878D82A}">
+                    <a16:rowId xmlns:a16="http://schemas.microsoft.com/office/drawing/2014/main" val="3191730107"/>
+                  </a:ext>
+                </a:extLst>
+              </a:tr>
+              <a:tr h="493940">
+                <a:tc>
+                  <a:txBody>
+                    <a:bodyPr/>
+                    <a:lstStyle/>
+                    <a:p>
+                      <a:pPr>
+                        <a:lnSpc>
+                          <a:spcPct val="115000"/>
+                        </a:lnSpc>
+                        <a:spcAft>
+                          <a:spcPts val="1000"/>
+                        </a:spcAft>
+                        <a:buNone/>
+                      </a:pPr>
+                      <a:r>
+                        <a:rPr lang="en-IN" sz="1100">
+                          <a:effectLst/>
+                        </a:rPr>
+                        <a:t>Runs Where</a:t>
+                      </a:r>
+                      <a:endParaRPr lang="en-IN" sz="1100">
+                        <a:effectLst/>
+                        <a:latin typeface="Calibri" panose="020F0502020204030204" pitchFamily="34" charset="0"/>
+                        <a:ea typeface="Calibri" panose="020F0502020204030204" pitchFamily="34" charset="0"/>
+                        <a:cs typeface="Times New Roman" panose="02020603050405020304" pitchFamily="18" charset="0"/>
+                      </a:endParaRPr>
+                    </a:p>
+                  </a:txBody>
+                  <a:tcPr marL="9525" marR="9525" marT="9525" marB="9525" anchor="ctr"/>
+                </a:tc>
+                <a:tc>
+                  <a:txBody>
+                    <a:bodyPr/>
+                    <a:lstStyle/>
+                    <a:p>
+                      <a:pPr>
+                        <a:lnSpc>
+                          <a:spcPct val="115000"/>
+                        </a:lnSpc>
+                        <a:spcAft>
+                          <a:spcPts val="1000"/>
+                        </a:spcAft>
+                        <a:buNone/>
+                      </a:pPr>
+                      <a:r>
+                        <a:rPr lang="en-IN" sz="1100" dirty="0">
+                          <a:effectLst/>
+                        </a:rPr>
+                        <a:t>Data warehouse</a:t>
+                      </a:r>
+                      <a:endParaRPr lang="en-IN" sz="1100" dirty="0">
+                        <a:effectLst/>
+                        <a:latin typeface="Calibri" panose="020F0502020204030204" pitchFamily="34" charset="0"/>
+                        <a:ea typeface="Calibri" panose="020F0502020204030204" pitchFamily="34" charset="0"/>
+                        <a:cs typeface="Times New Roman" panose="02020603050405020304" pitchFamily="18" charset="0"/>
+                      </a:endParaRPr>
+                    </a:p>
+                  </a:txBody>
+                  <a:tcPr marL="9525" marR="9525" marT="9525" marB="9525" anchor="ctr"/>
+                </a:tc>
+                <a:tc>
+                  <a:txBody>
+                    <a:bodyPr/>
+                    <a:lstStyle/>
+                    <a:p>
+                      <a:pPr>
+                        <a:lnSpc>
+                          <a:spcPct val="115000"/>
+                        </a:lnSpc>
+                        <a:spcAft>
+                          <a:spcPts val="1000"/>
+                        </a:spcAft>
+                        <a:buNone/>
+                      </a:pPr>
+                      <a:r>
+                        <a:rPr lang="en-IN" sz="1100">
+                          <a:effectLst/>
+                        </a:rPr>
+                        <a:t>External scheduler</a:t>
+                      </a:r>
+                      <a:endParaRPr lang="en-IN" sz="1100">
+                        <a:effectLst/>
+                        <a:latin typeface="Calibri" panose="020F0502020204030204" pitchFamily="34" charset="0"/>
+                        <a:ea typeface="Calibri" panose="020F0502020204030204" pitchFamily="34" charset="0"/>
+                        <a:cs typeface="Times New Roman" panose="02020603050405020304" pitchFamily="18" charset="0"/>
+                      </a:endParaRPr>
+                    </a:p>
+                  </a:txBody>
+                  <a:tcPr marL="9525" marR="9525" marT="9525" marB="9525" anchor="ctr"/>
+                </a:tc>
+                <a:extLst>
+                  <a:ext uri="{0D108BD9-81ED-4DB2-BD59-A6C34878D82A}">
+                    <a16:rowId xmlns:a16="http://schemas.microsoft.com/office/drawing/2014/main" val="1298132201"/>
+                  </a:ext>
+                </a:extLst>
+              </a:tr>
+              <a:tr h="493940">
+                <a:tc>
+                  <a:txBody>
+                    <a:bodyPr/>
+                    <a:lstStyle/>
+                    <a:p>
+                      <a:pPr>
+                        <a:lnSpc>
+                          <a:spcPct val="115000"/>
+                        </a:lnSpc>
+                        <a:spcAft>
+                          <a:spcPts val="1000"/>
+                        </a:spcAft>
+                        <a:buNone/>
+                      </a:pPr>
+                      <a:r>
+                        <a:rPr lang="en-IN" sz="1100">
+                          <a:effectLst/>
+                        </a:rPr>
+                        <a:t>DAG Type</a:t>
+                      </a:r>
+                      <a:endParaRPr lang="en-IN" sz="1100">
+                        <a:effectLst/>
+                        <a:latin typeface="Calibri" panose="020F0502020204030204" pitchFamily="34" charset="0"/>
+                        <a:ea typeface="Calibri" panose="020F0502020204030204" pitchFamily="34" charset="0"/>
+                        <a:cs typeface="Times New Roman" panose="02020603050405020304" pitchFamily="18" charset="0"/>
+                      </a:endParaRPr>
+                    </a:p>
+                  </a:txBody>
+                  <a:tcPr marL="9525" marR="9525" marT="9525" marB="9525" anchor="ctr"/>
+                </a:tc>
+                <a:tc>
+                  <a:txBody>
+                    <a:bodyPr/>
+                    <a:lstStyle/>
+                    <a:p>
+                      <a:pPr>
+                        <a:lnSpc>
+                          <a:spcPct val="115000"/>
+                        </a:lnSpc>
+                        <a:spcAft>
+                          <a:spcPts val="1000"/>
+                        </a:spcAft>
+                        <a:buNone/>
+                      </a:pPr>
+                      <a:r>
+                        <a:rPr lang="en-IN" sz="1100">
+                          <a:effectLst/>
+                        </a:rPr>
+                        <a:t>Data lineage DAG</a:t>
+                      </a:r>
+                      <a:endParaRPr lang="en-IN" sz="1100">
+                        <a:effectLst/>
+                        <a:latin typeface="Calibri" panose="020F0502020204030204" pitchFamily="34" charset="0"/>
+                        <a:ea typeface="Calibri" panose="020F0502020204030204" pitchFamily="34" charset="0"/>
+                        <a:cs typeface="Times New Roman" panose="02020603050405020304" pitchFamily="18" charset="0"/>
+                      </a:endParaRPr>
+                    </a:p>
+                  </a:txBody>
+                  <a:tcPr marL="9525" marR="9525" marT="9525" marB="9525" anchor="ctr"/>
+                </a:tc>
+                <a:tc>
+                  <a:txBody>
+                    <a:bodyPr/>
+                    <a:lstStyle/>
+                    <a:p>
+                      <a:pPr>
+                        <a:lnSpc>
+                          <a:spcPct val="115000"/>
+                        </a:lnSpc>
+                        <a:spcAft>
+                          <a:spcPts val="1000"/>
+                        </a:spcAft>
+                        <a:buNone/>
+                      </a:pPr>
+                      <a:r>
+                        <a:rPr lang="en-IN" sz="1100">
+                          <a:effectLst/>
+                        </a:rPr>
+                        <a:t>Task DAG</a:t>
+                      </a:r>
+                      <a:endParaRPr lang="en-IN" sz="1100">
+                        <a:effectLst/>
+                        <a:latin typeface="Calibri" panose="020F0502020204030204" pitchFamily="34" charset="0"/>
+                        <a:ea typeface="Calibri" panose="020F0502020204030204" pitchFamily="34" charset="0"/>
+                        <a:cs typeface="Times New Roman" panose="02020603050405020304" pitchFamily="18" charset="0"/>
+                      </a:endParaRPr>
+                    </a:p>
+                  </a:txBody>
+                  <a:tcPr marL="9525" marR="9525" marT="9525" marB="9525" anchor="ctr"/>
+                </a:tc>
+                <a:extLst>
+                  <a:ext uri="{0D108BD9-81ED-4DB2-BD59-A6C34878D82A}">
+                    <a16:rowId xmlns:a16="http://schemas.microsoft.com/office/drawing/2014/main" val="1418933277"/>
+                  </a:ext>
+                </a:extLst>
+              </a:tr>
+              <a:tr h="493940">
+                <a:tc>
+                  <a:txBody>
+                    <a:bodyPr/>
+                    <a:lstStyle/>
+                    <a:p>
+                      <a:pPr>
+                        <a:lnSpc>
+                          <a:spcPct val="115000"/>
+                        </a:lnSpc>
+                        <a:spcAft>
+                          <a:spcPts val="1000"/>
+                        </a:spcAft>
+                        <a:buNone/>
+                      </a:pPr>
+                      <a:r>
+                        <a:rPr lang="en-IN" sz="1100">
+                          <a:effectLst/>
+                        </a:rPr>
+                        <a:t>Testing</a:t>
+                      </a:r>
+                      <a:endParaRPr lang="en-IN" sz="1100">
+                        <a:effectLst/>
+                        <a:latin typeface="Calibri" panose="020F0502020204030204" pitchFamily="34" charset="0"/>
+                        <a:ea typeface="Calibri" panose="020F0502020204030204" pitchFamily="34" charset="0"/>
+                        <a:cs typeface="Times New Roman" panose="02020603050405020304" pitchFamily="18" charset="0"/>
+                      </a:endParaRPr>
+                    </a:p>
+                  </a:txBody>
+                  <a:tcPr marL="9525" marR="9525" marT="9525" marB="9525" anchor="ctr"/>
+                </a:tc>
+                <a:tc>
+                  <a:txBody>
+                    <a:bodyPr/>
+                    <a:lstStyle/>
+                    <a:p>
+                      <a:pPr>
+                        <a:lnSpc>
+                          <a:spcPct val="115000"/>
+                        </a:lnSpc>
+                        <a:spcAft>
+                          <a:spcPts val="1000"/>
+                        </a:spcAft>
+                        <a:buNone/>
+                      </a:pPr>
+                      <a:r>
+                        <a:rPr lang="en-IN" sz="1100">
+                          <a:effectLst/>
+                        </a:rPr>
+                        <a:t>Built-in</a:t>
+                      </a:r>
+                      <a:endParaRPr lang="en-IN" sz="1100">
+                        <a:effectLst/>
+                        <a:latin typeface="Calibri" panose="020F0502020204030204" pitchFamily="34" charset="0"/>
+                        <a:ea typeface="Calibri" panose="020F0502020204030204" pitchFamily="34" charset="0"/>
+                        <a:cs typeface="Times New Roman" panose="02020603050405020304" pitchFamily="18" charset="0"/>
+                      </a:endParaRPr>
+                    </a:p>
+                  </a:txBody>
+                  <a:tcPr marL="9525" marR="9525" marT="9525" marB="9525" anchor="ctr"/>
+                </a:tc>
+                <a:tc>
+                  <a:txBody>
+                    <a:bodyPr/>
+                    <a:lstStyle/>
+                    <a:p>
+                      <a:pPr>
+                        <a:lnSpc>
+                          <a:spcPct val="115000"/>
+                        </a:lnSpc>
+                        <a:spcAft>
+                          <a:spcPts val="1000"/>
+                        </a:spcAft>
+                        <a:buNone/>
+                      </a:pPr>
+                      <a:r>
+                        <a:rPr lang="en-IN" sz="1100">
+                          <a:effectLst/>
+                        </a:rPr>
+                        <a:t>No (manual)</a:t>
+                      </a:r>
+                      <a:endParaRPr lang="en-IN" sz="1100">
+                        <a:effectLst/>
+                        <a:latin typeface="Calibri" panose="020F0502020204030204" pitchFamily="34" charset="0"/>
+                        <a:ea typeface="Calibri" panose="020F0502020204030204" pitchFamily="34" charset="0"/>
+                        <a:cs typeface="Times New Roman" panose="02020603050405020304" pitchFamily="18" charset="0"/>
+                      </a:endParaRPr>
+                    </a:p>
+                  </a:txBody>
+                  <a:tcPr marL="9525" marR="9525" marT="9525" marB="9525" anchor="ctr"/>
+                </a:tc>
+                <a:extLst>
+                  <a:ext uri="{0D108BD9-81ED-4DB2-BD59-A6C34878D82A}">
+                    <a16:rowId xmlns:a16="http://schemas.microsoft.com/office/drawing/2014/main" val="2595209060"/>
+                  </a:ext>
+                </a:extLst>
+              </a:tr>
+              <a:tr h="493940">
+                <a:tc>
+                  <a:txBody>
+                    <a:bodyPr/>
+                    <a:lstStyle/>
+                    <a:p>
+                      <a:pPr>
+                        <a:lnSpc>
+                          <a:spcPct val="115000"/>
+                        </a:lnSpc>
+                        <a:spcAft>
+                          <a:spcPts val="1000"/>
+                        </a:spcAft>
+                        <a:buNone/>
+                      </a:pPr>
+                      <a:r>
+                        <a:rPr lang="en-IN" sz="1100" dirty="0">
+                          <a:effectLst/>
+                        </a:rPr>
+                        <a:t>Use Case</a:t>
+                      </a:r>
+                      <a:endParaRPr lang="en-IN" sz="1100" dirty="0">
+                        <a:effectLst/>
+                        <a:latin typeface="Calibri" panose="020F0502020204030204" pitchFamily="34" charset="0"/>
+                        <a:ea typeface="Calibri" panose="020F0502020204030204" pitchFamily="34" charset="0"/>
+                        <a:cs typeface="Times New Roman" panose="02020603050405020304" pitchFamily="18" charset="0"/>
+                      </a:endParaRPr>
+                    </a:p>
+                  </a:txBody>
+                  <a:tcPr marL="9525" marR="9525" marT="9525" marB="9525" anchor="ctr"/>
+                </a:tc>
+                <a:tc>
+                  <a:txBody>
+                    <a:bodyPr/>
+                    <a:lstStyle/>
+                    <a:p>
+                      <a:pPr>
+                        <a:lnSpc>
+                          <a:spcPct val="115000"/>
+                        </a:lnSpc>
+                        <a:spcAft>
+                          <a:spcPts val="1000"/>
+                        </a:spcAft>
+                        <a:buNone/>
+                      </a:pPr>
+                      <a:r>
+                        <a:rPr lang="en-IN" sz="1100">
+                          <a:effectLst/>
+                        </a:rPr>
+                        <a:t>Transform data</a:t>
+                      </a:r>
+                      <a:endParaRPr lang="en-IN" sz="1100">
+                        <a:effectLst/>
+                        <a:latin typeface="Calibri" panose="020F0502020204030204" pitchFamily="34" charset="0"/>
+                        <a:ea typeface="Calibri" panose="020F0502020204030204" pitchFamily="34" charset="0"/>
+                        <a:cs typeface="Times New Roman" panose="02020603050405020304" pitchFamily="18" charset="0"/>
+                      </a:endParaRPr>
+                    </a:p>
+                  </a:txBody>
+                  <a:tcPr marL="9525" marR="9525" marT="9525" marB="9525" anchor="ctr"/>
+                </a:tc>
+                <a:tc>
+                  <a:txBody>
+                    <a:bodyPr/>
+                    <a:lstStyle/>
+                    <a:p>
+                      <a:pPr>
+                        <a:lnSpc>
+                          <a:spcPct val="115000"/>
+                        </a:lnSpc>
+                        <a:spcAft>
+                          <a:spcPts val="1000"/>
+                        </a:spcAft>
+                        <a:buNone/>
+                      </a:pPr>
+                      <a:r>
+                        <a:rPr lang="en-IN" sz="1100" dirty="0">
+                          <a:effectLst/>
+                        </a:rPr>
+                        <a:t>Schedule &amp; automate</a:t>
+                      </a:r>
+                      <a:endParaRPr lang="en-IN" sz="1100" dirty="0">
+                        <a:effectLst/>
+                        <a:latin typeface="Calibri" panose="020F0502020204030204" pitchFamily="34" charset="0"/>
+                        <a:ea typeface="Calibri" panose="020F0502020204030204" pitchFamily="34" charset="0"/>
+                        <a:cs typeface="Times New Roman" panose="02020603050405020304" pitchFamily="18" charset="0"/>
+                      </a:endParaRPr>
+                    </a:p>
+                  </a:txBody>
+                  <a:tcPr marL="9525" marR="9525" marT="9525" marB="9525" anchor="ctr"/>
+                </a:tc>
+                <a:extLst>
+                  <a:ext uri="{0D108BD9-81ED-4DB2-BD59-A6C34878D82A}">
+                    <a16:rowId xmlns:a16="http://schemas.microsoft.com/office/drawing/2014/main" val="276535787"/>
+                  </a:ext>
+                </a:extLst>
+              </a:tr>
+            </a:tbl>
+          </a:graphicData>
+        </a:graphic>
+      </p:graphicFrame>
+      <p:sp>
+        <p:nvSpPr>
+          <p:cNvPr id="5" name="Rectangle 1">
+            <a:extLst>
+              <a:ext uri="{FF2B5EF4-FFF2-40B4-BE49-F238E27FC236}">
+                <a16:creationId xmlns:a16="http://schemas.microsoft.com/office/drawing/2014/main" id="{8D10F13D-BFFB-A7DD-63E6-AE9E72E6157F}"/>
+              </a:ext>
+            </a:extLst>
+          </p:cNvPr>
+          <p:cNvSpPr>
+            <a:spLocks noChangeArrowheads="1"/>
+          </p:cNvSpPr>
+          <p:nvPr/>
+        </p:nvSpPr>
+        <p:spPr bwMode="auto">
+          <a:xfrm>
+            <a:off x="0" y="0"/>
+            <a:ext cx="9144000" cy="457200"/>
+          </a:xfrm>
+          <a:prstGeom prst="rect">
+            <a:avLst/>
+          </a:prstGeom>
+          <a:noFill/>
+          <a:ln>
+            <a:noFill/>
+          </a:ln>
+          <a:effectLst/>
+          <a:extLst>
+            <a:ext uri="{909E8E84-426E-40DD-AFC4-6F175D3DCCD1}">
+              <a14:hiddenFill xmlns:a14="http://schemas.microsoft.com/office/drawing/2010/main">
+                <a:solidFill>
+                  <a:schemeClr val="accent1"/>
+                </a:solidFill>
+              </a14:hiddenFill>
+            </a:ext>
+            <a:ext uri="{91240B29-F687-4F45-9708-019B960494DF}">
+              <a14:hiddenLine xmlns:a14="http://schemas.microsoft.com/office/drawing/2010/main" w="9525">
+                <a:solidFill>
+                  <a:schemeClr val="tx1"/>
+                </a:solidFill>
+                <a:miter lim="800000"/>
+                <a:headEnd/>
+                <a:tailEnd/>
+              </a14:hiddenLine>
+            </a:ext>
+            <a:ext uri="{AF507438-7753-43E0-B8FC-AC1667EBCBE1}">
+              <a14:hiddenEffects xmlns:a14="http://schemas.microsoft.com/office/drawing/2010/main">
+                <a:effectLst>
+                  <a:outerShdw dist="35921" dir="2700000" algn="ctr" rotWithShape="0">
+                    <a:schemeClr val="bg2"/>
+                  </a:outerShdw>
+                </a:effectLst>
+              </a14:hiddenEffects>
+            </a:ext>
+          </a:extLst>
+        </p:spPr>
+        <p:txBody>
+          <a:bodyPr vert="horz" wrap="none" lIns="91440" tIns="45720" rIns="91440" bIns="45720" numCol="1" anchor="ctr" anchorCtr="0" compatLnSpc="1">
+            <a:prstTxWarp prst="textNoShape">
+              <a:avLst/>
+            </a:prstTxWarp>
+            <a:spAutoFit/>
+          </a:bodyPr>
+          <a:lstStyle/>
+          <a:p>
+            <a:endParaRPr lang="en-IN"/>
+          </a:p>
+        </p:txBody>
+      </p:sp>
+    </p:spTree>
+    <p:extLst>
+      <p:ext uri="{BB962C8B-B14F-4D97-AF65-F5344CB8AC3E}">
+        <p14:creationId xmlns:p14="http://schemas.microsoft.com/office/powerpoint/2010/main" val="4240654830"/>
+      </p:ext>
+    </p:extLst>
+  </p:cSld>
+  <p:clrMapOvr>
+    <a:masterClrMapping/>
+  </p:clrMapOvr>
+</p:sld>
+</file>
+
+<file path=ppt/slides/slide49.xml><?xml version="1.0" encoding="utf-8"?>
 <p:sld xmlns:a="http://schemas.openxmlformats.org/drawingml/2006/main" xmlns:r="http://schemas.openxmlformats.org/officeDocument/2006/relationships" xmlns:p="http://schemas.openxmlformats.org/presentationml/2006/main">
   <p:cSld>
     <p:spTree>
